--- a/decks/32x-ramp-latest.pptx
+++ b/decks/32x-ramp-latest.pptx
@@ -7,6 +7,7 @@
   <p:sldIdLst>
     <p:sldId id="256" r:id="rId7"/>
     <p:sldId id="257" r:id="rId8"/>
+    <p:sldId id="258" r:id="rId9"/>
   </p:sldIdLst>
   <p:sldSz cx="12191695" cy="6858000" type="screen4x3"/>
   <p:notesSz cx="6858000" cy="9144000"/>
@@ -3572,7 +3573,7 @@
                 </a:solidFill>
                 <a:latin typeface="Arial"/>
               </a:rPr>
-              <a:t>  reported 8d ago</a:t>
+              <a:t>  reported 9d ago</a:t>
             </a:r>
           </a:p>
         </p:txBody>
@@ -6830,6 +6831,397 @@
                 </a:solidFill>
                 <a:latin typeface="Arial"/>
               </a:rPr>
+              <a:t>32x Rack 2</a:t>
+            </a:r>
+          </a:p>
+          <a:p>
+            <a:pPr algn="l">
+              <a:spcAft>
+                <a:spcPts val="100"/>
+              </a:spcAft>
+            </a:pPr>
+            <a:r>
+              <a:rPr sz="1250" b="0">
+                <a:solidFill>
+                  <a:srgbClr val="6B6B6B"/>
+                </a:solidFill>
+                <a:latin typeface="Arial"/>
+              </a:rPr>
+              <a:t>Pegatron · 2026-08-22 · assembled this week</a:t>
+            </a:r>
+          </a:p>
+        </p:txBody>
+      </p:sp>
+      <p:sp>
+        <p:nvSpPr>
+          <p:cNvPr id="3" name="Rectangle 2"/>
+          <p:cNvSpPr/>
+          <p:nvPr/>
+        </p:nvSpPr>
+        <p:spPr>
+          <a:xfrm>
+            <a:off x="502920" y="1170432"/>
+            <a:ext cx="11185855" cy="13970"/>
+          </a:xfrm>
+          <a:prstGeom prst="rect">
+            <a:avLst/>
+          </a:prstGeom>
+          <a:solidFill>
+            <a:srgbClr val="D8D6CF"/>
+          </a:solidFill>
+          <a:ln>
+            <a:noFill/>
+          </a:ln>
+          <a:effectLst/>
+        </p:spPr>
+        <p:style>
+          <a:lnRef idx="1">
+            <a:schemeClr val="accent1"/>
+          </a:lnRef>
+          <a:fillRef idx="3">
+            <a:schemeClr val="accent1"/>
+          </a:fillRef>
+          <a:effectRef idx="2">
+            <a:schemeClr val="accent1"/>
+          </a:effectRef>
+          <a:fontRef idx="minor">
+            <a:schemeClr val="lt1"/>
+          </a:fontRef>
+        </p:style>
+        <p:txBody>
+          <a:bodyPr rtlCol="0" anchor="ctr"/>
+          <a:lstStyle/>
+          <a:p>
+            <a:pPr algn="ctr"/>
+          </a:p>
+        </p:txBody>
+      </p:sp>
+      <p:sp>
+        <p:nvSpPr>
+          <p:cNvPr id="4" name="TextBox 3"/>
+          <p:cNvSpPr txBox="1"/>
+          <p:nvPr/>
+        </p:nvSpPr>
+        <p:spPr>
+          <a:xfrm>
+            <a:off x="658368" y="1481328"/>
+            <a:ext cx="10874959" cy="822960"/>
+          </a:xfrm>
+          <a:prstGeom prst="rect">
+            <a:avLst/>
+          </a:prstGeom>
+          <a:noFill/>
+        </p:spPr>
+        <p:txBody>
+          <a:bodyPr wrap="square" lIns="0" rIns="0" tIns="0" bIns="0">
+            <a:spAutoFit/>
+          </a:bodyPr>
+          <a:lstStyle/>
+          <a:p>
+            <a:pPr algn="l">
+              <a:spcAft>
+                <a:spcPts val="200"/>
+              </a:spcAft>
+            </a:pPr>
+            <a:r>
+              <a:rPr sz="1700" b="1">
+                <a:solidFill>
+                  <a:srgbClr val="141414"/>
+                </a:solidFill>
+                <a:latin typeface="Arial"/>
+              </a:rPr>
+              <a:t>Four Sohu servers, cabled and standing.</a:t>
+            </a:r>
+          </a:p>
+          <a:p>
+            <a:pPr algn="l">
+              <a:spcAft>
+                <a:spcPts val="200"/>
+              </a:spcAft>
+            </a:pPr>
+            <a:r>
+              <a:rPr sz="1200" b="0">
+                <a:solidFill>
+                  <a:srgbClr val="6B6B6B"/>
+                </a:solidFill>
+                <a:latin typeface="Arial"/>
+              </a:rPr>
+              <a:t>Rack serial 268708630001</a:t>
+            </a:r>
+          </a:p>
+        </p:txBody>
+      </p:sp>
+      <p:sp>
+        <p:nvSpPr>
+          <p:cNvPr id="5" name="TextBox 4"/>
+          <p:cNvSpPr txBox="1"/>
+          <p:nvPr/>
+        </p:nvSpPr>
+        <p:spPr>
+          <a:xfrm>
+            <a:off x="658368" y="2487168"/>
+            <a:ext cx="3840480" cy="2011680"/>
+          </a:xfrm>
+          <a:prstGeom prst="rect">
+            <a:avLst/>
+          </a:prstGeom>
+          <a:noFill/>
+        </p:spPr>
+        <p:txBody>
+          <a:bodyPr wrap="square" lIns="0" rIns="0" tIns="0" bIns="0">
+            <a:spAutoFit/>
+          </a:bodyPr>
+          <a:lstStyle/>
+          <a:p>
+            <a:pPr algn="l">
+              <a:spcAft>
+                <a:spcPts val="300"/>
+              </a:spcAft>
+            </a:pPr>
+            <a:r>
+              <a:rPr sz="1100" b="1">
+                <a:solidFill>
+                  <a:srgbClr val="6B6B6B"/>
+                </a:solidFill>
+                <a:latin typeface="Arial"/>
+              </a:rPr>
+              <a:t>Slot</a:t>
+            </a:r>
+            <a:r>
+              <a:rPr sz="1100" b="1">
+                <a:solidFill>
+                  <a:srgbClr val="6B6B6B"/>
+                </a:solidFill>
+                <a:latin typeface="Arial"/>
+              </a:rPr>
+              <a:t>    Serial</a:t>
+            </a:r>
+          </a:p>
+          <a:p>
+            <a:pPr algn="l">
+              <a:spcAft>
+                <a:spcPts val="300"/>
+              </a:spcAft>
+            </a:pPr>
+            <a:r>
+              <a:rPr sz="1300" b="1">
+                <a:solidFill>
+                  <a:srgbClr val="141414"/>
+                </a:solidFill>
+                <a:latin typeface="Arial"/>
+              </a:rPr>
+              <a:t>SS1</a:t>
+            </a:r>
+            <a:r>
+              <a:rPr sz="1300" b="0">
+                <a:solidFill>
+                  <a:srgbClr val="141414"/>
+                </a:solidFill>
+                <a:latin typeface="Arial"/>
+              </a:rPr>
+              <a:t>    268645410001</a:t>
+            </a:r>
+          </a:p>
+          <a:p>
+            <a:pPr algn="l">
+              <a:spcAft>
+                <a:spcPts val="300"/>
+              </a:spcAft>
+            </a:pPr>
+            <a:r>
+              <a:rPr sz="1300" b="1">
+                <a:solidFill>
+                  <a:srgbClr val="141414"/>
+                </a:solidFill>
+                <a:latin typeface="Arial"/>
+              </a:rPr>
+              <a:t>SS2</a:t>
+            </a:r>
+            <a:r>
+              <a:rPr sz="1300" b="0">
+                <a:solidFill>
+                  <a:srgbClr val="141414"/>
+                </a:solidFill>
+                <a:latin typeface="Arial"/>
+              </a:rPr>
+              <a:t>    268645440007</a:t>
+            </a:r>
+          </a:p>
+          <a:p>
+            <a:pPr algn="l">
+              <a:spcAft>
+                <a:spcPts val="300"/>
+              </a:spcAft>
+            </a:pPr>
+            <a:r>
+              <a:rPr sz="1300" b="1">
+                <a:solidFill>
+                  <a:srgbClr val="141414"/>
+                </a:solidFill>
+                <a:latin typeface="Arial"/>
+              </a:rPr>
+              <a:t>SS3</a:t>
+            </a:r>
+            <a:r>
+              <a:rPr sz="1300" b="0">
+                <a:solidFill>
+                  <a:srgbClr val="141414"/>
+                </a:solidFill>
+                <a:latin typeface="Arial"/>
+              </a:rPr>
+              <a:t>    268645430002</a:t>
+            </a:r>
+          </a:p>
+          <a:p>
+            <a:pPr algn="l">
+              <a:spcAft>
+                <a:spcPts val="300"/>
+              </a:spcAft>
+            </a:pPr>
+            <a:r>
+              <a:rPr sz="1300" b="1">
+                <a:solidFill>
+                  <a:srgbClr val="141414"/>
+                </a:solidFill>
+                <a:latin typeface="Arial"/>
+              </a:rPr>
+              <a:t>SS4</a:t>
+            </a:r>
+            <a:r>
+              <a:rPr sz="1300" b="0">
+                <a:solidFill>
+                  <a:srgbClr val="141414"/>
+                </a:solidFill>
+                <a:latin typeface="Arial"/>
+              </a:rPr>
+              <a:t>    268645430004</a:t>
+            </a:r>
+          </a:p>
+        </p:txBody>
+      </p:sp>
+      <p:sp>
+        <p:nvSpPr>
+          <p:cNvPr id="6" name="TextBox 5"/>
+          <p:cNvSpPr txBox="1"/>
+          <p:nvPr/>
+        </p:nvSpPr>
+        <p:spPr>
+          <a:xfrm>
+            <a:off x="4846320" y="2487168"/>
+            <a:ext cx="6687007" cy="2011680"/>
+          </a:xfrm>
+          <a:prstGeom prst="rect">
+            <a:avLst/>
+          </a:prstGeom>
+          <a:noFill/>
+        </p:spPr>
+        <p:txBody>
+          <a:bodyPr wrap="square" lIns="0" rIns="0" tIns="0" bIns="0">
+            <a:spAutoFit/>
+          </a:bodyPr>
+          <a:lstStyle/>
+          <a:p>
+            <a:pPr algn="l">
+              <a:spcAft>
+                <a:spcPts val="400"/>
+              </a:spcAft>
+            </a:pPr>
+            <a:r>
+              <a:rPr sz="1100" b="1">
+                <a:solidFill>
+                  <a:srgbClr val="6B6B6B"/>
+                </a:solidFill>
+                <a:latin typeface="Arial"/>
+              </a:rPr>
+              <a:t>Where it stands</a:t>
+            </a:r>
+          </a:p>
+          <a:p>
+            <a:pPr algn="l">
+              <a:spcAft>
+                <a:spcPts val="400"/>
+              </a:spcAft>
+            </a:pPr>
+            <a:r>
+              <a:rPr sz="1300" b="0">
+                <a:solidFill>
+                  <a:srgbClr val="141414"/>
+                </a:solidFill>
+                <a:latin typeface="Arial"/>
+              </a:rPr>
+              <a:t>Assembled, not yet tested: no controller has an L11 run against this rack or its four servers. Provisioning and rack test are still ahead of it.</a:t>
+            </a:r>
+          </a:p>
+          <a:p>
+            <a:pPr algn="l">
+              <a:spcAft>
+                <a:spcPts val="400"/>
+              </a:spcAft>
+            </a:pPr>
+            <a:r>
+              <a:rPr sz="900" b="0">
+                <a:solidFill>
+                  <a:srgbClr val="6B6B6B"/>
+                </a:solidFill>
+                <a:latin typeface="Arial"/>
+              </a:rPr>
+              <a:t>The all-hands page keeps this current from the controllers; this slide is a snapshot of 2026-W34.</a:t>
+            </a:r>
+          </a:p>
+        </p:txBody>
+      </p:sp>
+    </p:spTree>
+  </p:cSld>
+  <p:clrMapOvr>
+    <a:masterClrMapping/>
+  </p:clrMapOvr>
+</p:sld>
+</file>
+
+<file path=ppt/slides/slide3.xml><?xml version="1.0" encoding="utf-8"?>
+<p:sld xmlns:a="http://schemas.openxmlformats.org/drawingml/2006/main" xmlns:p="http://schemas.openxmlformats.org/presentationml/2006/main" xmlns:r="http://schemas.openxmlformats.org/officeDocument/2006/relationships">
+  <p:cSld>
+    <p:spTree>
+      <p:nvGrpSpPr>
+        <p:cNvPr id="1" name=""/>
+        <p:cNvGrpSpPr/>
+        <p:nvPr/>
+      </p:nvGrpSpPr>
+      <p:grpSpPr/>
+      <p:sp>
+        <p:nvSpPr>
+          <p:cNvPr id="2" name="TextBox 1"/>
+          <p:cNvSpPr txBox="1"/>
+          <p:nvPr/>
+        </p:nvSpPr>
+        <p:spPr>
+          <a:xfrm>
+            <a:off x="502920" y="310896"/>
+            <a:ext cx="11185855" cy="731520"/>
+          </a:xfrm>
+          <a:prstGeom prst="rect">
+            <a:avLst/>
+          </a:prstGeom>
+          <a:noFill/>
+        </p:spPr>
+        <p:txBody>
+          <a:bodyPr wrap="square" lIns="0" rIns="0" tIns="0" bIns="0">
+            <a:spAutoFit/>
+          </a:bodyPr>
+          <a:lstStyle/>
+          <a:p>
+            <a:pPr algn="l">
+              <a:spcAft>
+                <a:spcPts val="100"/>
+              </a:spcAft>
+            </a:pPr>
+            <a:r>
+              <a:rPr sz="2700" b="1">
+                <a:solidFill>
+                  <a:srgbClr val="141414"/>
+                </a:solidFill>
+                <a:latin typeface="Arial"/>
+              </a:rPr>
               <a:t>End-to-end test flow</a:t>
             </a:r>
           </a:p>
@@ -7279,7 +7671,7 @@
                 </a:solidFill>
                 <a:latin typeface="Arial"/>
               </a:rPr>
-              <a:t>  reported 8d ago</a:t>
+              <a:t>  reported 9d ago</a:t>
             </a:r>
           </a:p>
         </p:txBody>

--- a/decks/32x-ramp-latest.pptx
+++ b/decks/32x-ramp-latest.pptx
@@ -4789,7 +4789,7 @@
                 </a:solidFill>
                 <a:latin typeface="Arial"/>
               </a:rPr>
-              <a:t>FAT 16u · SFT 14u</a:t>
+              <a:t>FAT 0.0% · SFT 14.3%</a:t>
             </a:r>
           </a:p>
           <a:p>
@@ -4805,7 +4805,7 @@
                 </a:solidFill>
                 <a:latin typeface="Arial"/>
               </a:rPr>
-              <a:t>quantity only</a:t>
+              <a:t>* over 16 and 15 units</a:t>
             </a:r>
           </a:p>
         </p:txBody>
@@ -4900,29 +4900,22 @@
               </a:spcAft>
             </a:pPr>
             <a:r>
-              <a:rPr sz="1300" b="1">
-                <a:solidFill>
-                  <a:srgbClr val="141414"/>
-                </a:solidFill>
-                <a:latin typeface="Arial"/>
-              </a:rPr>
-              <a:t>2 units</a:t>
-            </a:r>
-          </a:p>
-          <a:p>
-            <a:pPr algn="l">
-              <a:spcAft>
-                <a:spcPts val="100"/>
-              </a:spcAft>
-            </a:pPr>
-            <a:r>
-              <a:rPr sz="800" b="0">
+              <a:rPr sz="1600" b="1">
+                <a:solidFill>
+                  <a:srgbClr val="B3281E"/>
+                </a:solidFill>
+                <a:latin typeface="Arial"/>
+              </a:rPr>
+              <a:t>0.0%</a:t>
+            </a:r>
+            <a:r>
+              <a:rPr sz="900" b="0">
                 <a:solidFill>
                   <a:srgbClr val="6B6B6B"/>
                 </a:solidFill>
                 <a:latin typeface="Arial"/>
               </a:rPr>
-              <a:t>quantity only</a:t>
+              <a:t>  2u*</a:t>
             </a:r>
           </a:p>
         </p:txBody>
@@ -5102,29 +5095,22 @@
               </a:spcAft>
             </a:pPr>
             <a:r>
-              <a:rPr sz="1300" b="1">
-                <a:solidFill>
-                  <a:srgbClr val="141414"/>
-                </a:solidFill>
-                <a:latin typeface="Arial"/>
-              </a:rPr>
-              <a:t>5 units</a:t>
-            </a:r>
-          </a:p>
-          <a:p>
-            <a:pPr algn="l">
-              <a:spcAft>
-                <a:spcPts val="100"/>
-              </a:spcAft>
-            </a:pPr>
-            <a:r>
-              <a:rPr sz="800" b="0">
+              <a:rPr sz="1600" b="1">
+                <a:solidFill>
+                  <a:srgbClr val="B3281E"/>
+                </a:solidFill>
+                <a:latin typeface="Arial"/>
+              </a:rPr>
+              <a:t>25.0%</a:t>
+            </a:r>
+            <a:r>
+              <a:rPr sz="900" b="0">
                 <a:solidFill>
                   <a:srgbClr val="6B6B6B"/>
                 </a:solidFill>
                 <a:latin typeface="Arial"/>
               </a:rPr>
-              <a:t>quantity only</a:t>
+              <a:t>  5u*</a:t>
             </a:r>
           </a:p>
         </p:txBody>
@@ -6676,7 +6662,7 @@
                 </a:solidFill>
                 <a:latin typeface="Arial"/>
               </a:rPr>
-              <a:t> = quantity only, no yield reported.   </a:t>
+              <a:t> = a yield over few units, marked *.   </a:t>
             </a:r>
             <a:r>
               <a:rPr sz="950" b="1">
@@ -6710,7 +6696,7 @@
                 </a:solidFill>
                 <a:latin typeface="Arial"/>
               </a:rPr>
-              <a:t>Quantity only: L10 FAT, L10 SFT, L10 RIN, L10 2U, L11 Provision. L10 and L11 are chassis and rack level and in bring-up — a percentage over three chassis swings 33 points on one unit, so the counts are published and the yields are not.</a:t>
+              <a:t>A * marks a yield over fewer than 20 units — published, because a blank read as “nothing was tested here”, but it moves a long way on one unit. Only MLT × HTT is rolled up.</a:t>
             </a:r>
           </a:p>
           <a:p>
@@ -9714,29 +9700,22 @@
               </a:spcAft>
             </a:pPr>
             <a:r>
-              <a:rPr sz="965" b="1">
-                <a:solidFill>
-                  <a:srgbClr val="141414"/>
-                </a:solidFill>
-                <a:latin typeface="Arial"/>
-              </a:rPr>
-              <a:t>14 units</a:t>
-            </a:r>
-          </a:p>
-          <a:p>
-            <a:pPr algn="l">
-              <a:spcAft>
-                <a:spcPts val="100"/>
-              </a:spcAft>
-            </a:pPr>
-            <a:r>
-              <a:rPr sz="594" b="0">
+              <a:rPr sz="1188" b="1">
+                <a:solidFill>
+                  <a:srgbClr val="B3281E"/>
+                </a:solidFill>
+                <a:latin typeface="Arial"/>
+              </a:rPr>
+              <a:t>14.3%</a:t>
+            </a:r>
+            <a:r>
+              <a:rPr sz="668" b="0">
                 <a:solidFill>
                   <a:srgbClr val="6B6B6B"/>
                 </a:solidFill>
                 <a:latin typeface="Arial"/>
               </a:rPr>
-              <a:t>quantity only</a:t>
+              <a:t>  15u*</a:t>
             </a:r>
           </a:p>
         </p:txBody>
@@ -9831,29 +9810,22 @@
               </a:spcAft>
             </a:pPr>
             <a:r>
-              <a:rPr sz="965" b="1">
-                <a:solidFill>
-                  <a:srgbClr val="141414"/>
-                </a:solidFill>
-                <a:latin typeface="Arial"/>
-              </a:rPr>
-              <a:t>16 units</a:t>
-            </a:r>
-          </a:p>
-          <a:p>
-            <a:pPr algn="l">
-              <a:spcAft>
-                <a:spcPts val="100"/>
-              </a:spcAft>
-            </a:pPr>
-            <a:r>
-              <a:rPr sz="594" b="0">
+              <a:rPr sz="1188" b="1">
+                <a:solidFill>
+                  <a:srgbClr val="B3281E"/>
+                </a:solidFill>
+                <a:latin typeface="Arial"/>
+              </a:rPr>
+              <a:t>0.0%</a:t>
+            </a:r>
+            <a:r>
+              <a:rPr sz="668" b="0">
                 <a:solidFill>
                   <a:srgbClr val="6B6B6B"/>
                 </a:solidFill>
                 <a:latin typeface="Arial"/>
               </a:rPr>
-              <a:t>quantity only</a:t>
+              <a:t>  16u*</a:t>
             </a:r>
           </a:p>
         </p:txBody>
@@ -9948,29 +9920,22 @@
               </a:spcAft>
             </a:pPr>
             <a:r>
-              <a:rPr sz="965" b="1">
-                <a:solidFill>
-                  <a:srgbClr val="141414"/>
-                </a:solidFill>
-                <a:latin typeface="Arial"/>
-              </a:rPr>
-              <a:t>2 units</a:t>
-            </a:r>
-          </a:p>
-          <a:p>
-            <a:pPr algn="l">
-              <a:spcAft>
-                <a:spcPts val="100"/>
-              </a:spcAft>
-            </a:pPr>
-            <a:r>
-              <a:rPr sz="594" b="0">
+              <a:rPr sz="1188" b="1">
+                <a:solidFill>
+                  <a:srgbClr val="B3281E"/>
+                </a:solidFill>
+                <a:latin typeface="Arial"/>
+              </a:rPr>
+              <a:t>0.0%</a:t>
+            </a:r>
+            <a:r>
+              <a:rPr sz="668" b="0">
                 <a:solidFill>
                   <a:srgbClr val="6B6B6B"/>
                 </a:solidFill>
                 <a:latin typeface="Arial"/>
               </a:rPr>
-              <a:t>quantity only</a:t>
+              <a:t>  2u*</a:t>
             </a:r>
           </a:p>
         </p:txBody>
@@ -10150,29 +10115,22 @@
               </a:spcAft>
             </a:pPr>
             <a:r>
-              <a:rPr sz="965" b="1">
-                <a:solidFill>
-                  <a:srgbClr val="141414"/>
-                </a:solidFill>
-                <a:latin typeface="Arial"/>
-              </a:rPr>
-              <a:t>5 units</a:t>
-            </a:r>
-          </a:p>
-          <a:p>
-            <a:pPr algn="l">
-              <a:spcAft>
-                <a:spcPts val="100"/>
-              </a:spcAft>
-            </a:pPr>
-            <a:r>
-              <a:rPr sz="594" b="0">
+              <a:rPr sz="1188" b="1">
+                <a:solidFill>
+                  <a:srgbClr val="B3281E"/>
+                </a:solidFill>
+                <a:latin typeface="Arial"/>
+              </a:rPr>
+              <a:t>25.0%</a:t>
+            </a:r>
+            <a:r>
+              <a:rPr sz="668" b="0">
                 <a:solidFill>
                   <a:srgbClr val="6B6B6B"/>
                 </a:solidFill>
                 <a:latin typeface="Arial"/>
               </a:rPr>
-              <a:t>quantity only</a:t>
+              <a:t>  5u*</a:t>
             </a:r>
           </a:p>
         </p:txBody>
@@ -10400,29 +10358,22 @@
               </a:spcAft>
             </a:pPr>
             <a:r>
-              <a:rPr sz="965" b="1">
-                <a:solidFill>
-                  <a:srgbClr val="141414"/>
-                </a:solidFill>
-                <a:latin typeface="Arial"/>
-              </a:rPr>
-              <a:t>1 unit</a:t>
-            </a:r>
-          </a:p>
-          <a:p>
-            <a:pPr algn="l">
-              <a:spcAft>
-                <a:spcPts val="100"/>
-              </a:spcAft>
-            </a:pPr>
-            <a:r>
-              <a:rPr sz="594" b="0">
+              <a:rPr sz="1188" b="1">
+                <a:solidFill>
+                  <a:srgbClr val="B3281E"/>
+                </a:solidFill>
+                <a:latin typeface="Arial"/>
+              </a:rPr>
+              <a:t>0.0%</a:t>
+            </a:r>
+            <a:r>
+              <a:rPr sz="668" b="0">
                 <a:solidFill>
                   <a:srgbClr val="6B6B6B"/>
                 </a:solidFill>
                 <a:latin typeface="Arial"/>
               </a:rPr>
-              <a:t>quantity only</a:t>
+              <a:t>  1u*</a:t>
             </a:r>
           </a:p>
         </p:txBody>

--- a/decks/32x-ramp-latest.pptx
+++ b/decks/32x-ramp-latest.pptx
@@ -3140,7 +3140,7 @@
                 </a:solidFill>
                 <a:latin typeface="Arial"/>
               </a:rPr>
-              <a:t>2026-08-17 to 2026-08-23, week still running · first-pass yield and units, in the box · UTC</a:t>
+              <a:t>2026-08-17 to 2026-08-23 · first-pass yield and units, in the box · UTC</a:t>
             </a:r>
           </a:p>
         </p:txBody>
@@ -8587,11 +8587,11 @@
             <a:avLst/>
           </a:prstGeom>
           <a:solidFill>
-            <a:srgbClr val="D5E8D4"/>
+            <a:srgbClr val="DFE7EF"/>
           </a:solidFill>
           <a:ln w="12700">
             <a:solidFill>
-              <a:srgbClr val="82B366"/>
+              <a:srgbClr val="8FA8C0"/>
             </a:solidFill>
           </a:ln>
           <a:effectLst/>
@@ -8646,7 +8646,7 @@
               </a:spcAft>
             </a:pPr>
             <a:r>
-              <a:rPr sz="928" b="1">
+              <a:rPr sz="928" b="0">
                 <a:solidFill>
                   <a:srgbClr val="141414"/>
                 </a:solidFill>
@@ -8782,11 +8782,11 @@
             <a:avLst/>
           </a:prstGeom>
           <a:solidFill>
-            <a:srgbClr val="E6D0DE"/>
+            <a:srgbClr val="DFE7EF"/>
           </a:solidFill>
           <a:ln w="12700">
             <a:solidFill>
-              <a:srgbClr val="C29FB8"/>
+              <a:srgbClr val="8FA8C0"/>
             </a:solidFill>
           </a:ln>
           <a:effectLst/>
@@ -8876,8 +8876,294 @@
         </p:nvSpPr>
         <p:spPr>
           <a:xfrm>
-            <a:off x="4498848" y="2542032"/>
+            <a:off x="4498848" y="4270248"/>
             <a:ext cx="530352" cy="475488"/>
+          </a:xfrm>
+          <a:prstGeom prst="roundRect">
+            <a:avLst/>
+          </a:prstGeom>
+          <a:solidFill>
+            <a:srgbClr val="DFE7EF"/>
+          </a:solidFill>
+          <a:ln w="12700">
+            <a:solidFill>
+              <a:srgbClr val="8FA8C0"/>
+            </a:solidFill>
+          </a:ln>
+          <a:effectLst/>
+        </p:spPr>
+        <p:style>
+          <a:lnRef idx="1">
+            <a:schemeClr val="accent1"/>
+          </a:lnRef>
+          <a:fillRef idx="3">
+            <a:schemeClr val="accent1"/>
+          </a:fillRef>
+          <a:effectRef idx="2">
+            <a:schemeClr val="accent1"/>
+          </a:effectRef>
+          <a:fontRef idx="minor">
+            <a:schemeClr val="lt1"/>
+          </a:fontRef>
+        </p:style>
+        <p:txBody>
+          <a:bodyPr rtlCol="0" anchor="ctr"/>
+          <a:lstStyle/>
+          <a:p>
+            <a:pPr algn="ctr"/>
+          </a:p>
+        </p:txBody>
+      </p:sp>
+      <p:sp>
+        <p:nvSpPr>
+          <p:cNvPr id="37" name="TextBox 36"/>
+          <p:cNvSpPr txBox="1"/>
+          <p:nvPr/>
+        </p:nvSpPr>
+        <p:spPr>
+          <a:xfrm>
+            <a:off x="4581144" y="4334256"/>
+            <a:ext cx="365760" cy="365760"/>
+          </a:xfrm>
+          <a:prstGeom prst="rect">
+            <a:avLst/>
+          </a:prstGeom>
+          <a:noFill/>
+        </p:spPr>
+        <p:txBody>
+          <a:bodyPr wrap="square" lIns="0" rIns="0" tIns="0" bIns="0">
+            <a:spAutoFit/>
+          </a:bodyPr>
+          <a:lstStyle/>
+          <a:p>
+            <a:pPr algn="l">
+              <a:spcAft>
+                <a:spcPts val="100"/>
+              </a:spcAft>
+            </a:pPr>
+            <a:r>
+              <a:rPr sz="928" b="0">
+                <a:solidFill>
+                  <a:srgbClr val="141414"/>
+                </a:solidFill>
+                <a:latin typeface="Arial"/>
+              </a:rPr>
+              <a:t>BFT</a:t>
+            </a:r>
+          </a:p>
+          <a:p>
+            <a:pPr algn="l">
+              <a:spcAft>
+                <a:spcPts val="100"/>
+              </a:spcAft>
+            </a:pPr>
+            <a:r>
+              <a:rPr sz="631" b="0">
+                <a:solidFill>
+                  <a:srgbClr val="6B6B6B"/>
+                </a:solidFill>
+                <a:latin typeface="Arial"/>
+              </a:rPr>
+              <a:t>not collected · ETCH-39584</a:t>
+            </a:r>
+          </a:p>
+        </p:txBody>
+      </p:sp>
+      <p:sp>
+        <p:nvSpPr>
+          <p:cNvPr id="38" name="Rounded Rectangle 37"/>
+          <p:cNvSpPr/>
+          <p:nvPr/>
+        </p:nvSpPr>
+        <p:spPr>
+          <a:xfrm>
+            <a:off x="4498848" y="5422392"/>
+            <a:ext cx="530352" cy="475488"/>
+          </a:xfrm>
+          <a:prstGeom prst="roundRect">
+            <a:avLst/>
+          </a:prstGeom>
+          <a:solidFill>
+            <a:srgbClr val="DFE7EF"/>
+          </a:solidFill>
+          <a:ln w="12700">
+            <a:solidFill>
+              <a:srgbClr val="8FA8C0"/>
+            </a:solidFill>
+          </a:ln>
+          <a:effectLst/>
+        </p:spPr>
+        <p:style>
+          <a:lnRef idx="1">
+            <a:schemeClr val="accent1"/>
+          </a:lnRef>
+          <a:fillRef idx="3">
+            <a:schemeClr val="accent1"/>
+          </a:fillRef>
+          <a:effectRef idx="2">
+            <a:schemeClr val="accent1"/>
+          </a:effectRef>
+          <a:fontRef idx="minor">
+            <a:schemeClr val="lt1"/>
+          </a:fontRef>
+        </p:style>
+        <p:txBody>
+          <a:bodyPr rtlCol="0" anchor="ctr"/>
+          <a:lstStyle/>
+          <a:p>
+            <a:pPr algn="ctr"/>
+          </a:p>
+        </p:txBody>
+      </p:sp>
+      <p:sp>
+        <p:nvSpPr>
+          <p:cNvPr id="39" name="TextBox 38"/>
+          <p:cNvSpPr txBox="1"/>
+          <p:nvPr/>
+        </p:nvSpPr>
+        <p:spPr>
+          <a:xfrm>
+            <a:off x="4581144" y="5486400"/>
+            <a:ext cx="365760" cy="365760"/>
+          </a:xfrm>
+          <a:prstGeom prst="rect">
+            <a:avLst/>
+          </a:prstGeom>
+          <a:noFill/>
+        </p:spPr>
+        <p:txBody>
+          <a:bodyPr wrap="square" lIns="0" rIns="0" tIns="0" bIns="0">
+            <a:spAutoFit/>
+          </a:bodyPr>
+          <a:lstStyle/>
+          <a:p>
+            <a:pPr algn="l">
+              <a:spcAft>
+                <a:spcPts val="100"/>
+              </a:spcAft>
+            </a:pPr>
+            <a:r>
+              <a:rPr sz="928" b="0">
+                <a:solidFill>
+                  <a:srgbClr val="141414"/>
+                </a:solidFill>
+                <a:latin typeface="Arial"/>
+              </a:rPr>
+              <a:t>PDB CK</a:t>
+            </a:r>
+          </a:p>
+          <a:p>
+            <a:pPr algn="l">
+              <a:spcAft>
+                <a:spcPts val="100"/>
+              </a:spcAft>
+            </a:pPr>
+            <a:r>
+              <a:rPr sz="631" b="0">
+                <a:solidFill>
+                  <a:srgbClr val="6B6B6B"/>
+                </a:solidFill>
+                <a:latin typeface="Arial"/>
+              </a:rPr>
+              <a:t>not collected</a:t>
+            </a:r>
+          </a:p>
+        </p:txBody>
+      </p:sp>
+      <p:sp>
+        <p:nvSpPr>
+          <p:cNvPr id="40" name="TextBox 39"/>
+          <p:cNvSpPr txBox="1"/>
+          <p:nvPr/>
+        </p:nvSpPr>
+        <p:spPr>
+          <a:xfrm>
+            <a:off x="5376672" y="877824"/>
+            <a:ext cx="2743200" cy="237744"/>
+          </a:xfrm>
+          <a:prstGeom prst="rect">
+            <a:avLst/>
+          </a:prstGeom>
+          <a:noFill/>
+        </p:spPr>
+        <p:txBody>
+          <a:bodyPr wrap="square" lIns="0" rIns="0" tIns="0" bIns="0">
+            <a:spAutoFit/>
+          </a:bodyPr>
+          <a:lstStyle/>
+          <a:p>
+            <a:pPr algn="l">
+              <a:spcAft>
+                <a:spcPts val="0"/>
+              </a:spcAft>
+            </a:pPr>
+            <a:r>
+              <a:rPr sz="1000" b="0">
+                <a:solidFill>
+                  <a:srgbClr val="6B6B6B"/>
+                </a:solidFill>
+                <a:latin typeface="Arial"/>
+              </a:rPr>
+              <a:t/>
+            </a:r>
+            <a:r>
+              <a:rPr sz="1250" b="1">
+                <a:solidFill>
+                  <a:srgbClr val="141414"/>
+                </a:solidFill>
+                <a:latin typeface="Arial"/>
+              </a:rPr>
+              <a:t>FATP L10 2U/4U</a:t>
+            </a:r>
+          </a:p>
+        </p:txBody>
+      </p:sp>
+      <p:cxnSp>
+        <p:nvCxnSpPr>
+          <p:cNvPr id="41" name="Connector 40"/>
+          <p:cNvCxnSpPr/>
+          <p:nvPr/>
+        </p:nvCxnSpPr>
+        <p:spPr>
+          <a:xfrm>
+            <a:off x="6729984" y="914400"/>
+            <a:ext cx="0" cy="5029200"/>
+          </a:xfrm>
+          <a:prstGeom prst="line">
+            <a:avLst/>
+          </a:prstGeom>
+          <a:ln w="11430">
+            <a:solidFill>
+              <a:srgbClr val="B5B3AC"/>
+            </a:solidFill>
+            <a:prstDash val="dash"/>
+          </a:ln>
+        </p:spPr>
+        <p:style>
+          <a:lnRef idx="2">
+            <a:schemeClr val="accent1"/>
+          </a:lnRef>
+          <a:fillRef idx="0">
+            <a:schemeClr val="accent1"/>
+          </a:fillRef>
+          <a:effectRef idx="1">
+            <a:schemeClr val="accent1"/>
+          </a:effectRef>
+          <a:fontRef idx="minor">
+            <a:schemeClr val="tx1"/>
+          </a:fontRef>
+        </p:style>
+      </p:cxnSp>
+      <p:sp>
+        <p:nvSpPr>
+          <p:cNvPr id="42" name="Rounded Rectangle 41"/>
+          <p:cNvSpPr/>
+          <p:nvPr/>
+        </p:nvSpPr>
+        <p:spPr>
+          <a:xfrm>
+            <a:off x="5376672" y="1389888"/>
+            <a:ext cx="1298448" cy="475488"/>
           </a:xfrm>
           <a:prstGeom prst="roundRect">
             <a:avLst/>
@@ -8916,14 +9202,14 @@
       </p:sp>
       <p:sp>
         <p:nvSpPr>
-          <p:cNvPr id="37" name="TextBox 36"/>
+          <p:cNvPr id="43" name="TextBox 42"/>
           <p:cNvSpPr txBox="1"/>
           <p:nvPr/>
         </p:nvSpPr>
         <p:spPr>
           <a:xfrm>
-            <a:off x="4581144" y="2606040"/>
-            <a:ext cx="365760" cy="365760"/>
+            <a:off x="5458968" y="1453896"/>
+            <a:ext cx="1133856" cy="365760"/>
           </a:xfrm>
           <a:prstGeom prst="rect">
             <a:avLst/>
@@ -8942,43 +9228,27 @@
               </a:spcAft>
             </a:pPr>
             <a:r>
-              <a:rPr sz="928" b="1">
+              <a:rPr sz="928" b="0">
                 <a:solidFill>
                   <a:srgbClr val="141414"/>
                 </a:solidFill>
                 <a:latin typeface="Arial"/>
               </a:rPr>
-              <a:t>CK</a:t>
-            </a:r>
-          </a:p>
-          <a:p>
-            <a:pPr algn="l">
-              <a:spcAft>
-                <a:spcPts val="100"/>
-              </a:spcAft>
-            </a:pPr>
-            <a:r>
-              <a:rPr sz="631" b="0">
-                <a:solidFill>
-                  <a:srgbClr val="6B6B6B"/>
-                </a:solidFill>
-                <a:latin typeface="Arial"/>
-              </a:rPr>
-              <a:t>not collected</a:t>
-            </a:r>
-          </a:p>
-        </p:txBody>
-      </p:sp>
-      <p:sp>
-        <p:nvSpPr>
-          <p:cNvPr id="38" name="Rounded Rectangle 37"/>
+              <a:t>4U ASSY</a:t>
+            </a:r>
+          </a:p>
+        </p:txBody>
+      </p:sp>
+      <p:sp>
+        <p:nvSpPr>
+          <p:cNvPr id="44" name="Rounded Rectangle 43"/>
           <p:cNvSpPr/>
           <p:nvPr/>
         </p:nvSpPr>
         <p:spPr>
           <a:xfrm>
-            <a:off x="4498848" y="4270248"/>
-            <a:ext cx="530352" cy="475488"/>
+            <a:off x="5376672" y="1965960"/>
+            <a:ext cx="1298448" cy="475488"/>
           </a:xfrm>
           <a:prstGeom prst="roundRect">
             <a:avLst/>
@@ -9017,14 +9287,14 @@
       </p:sp>
       <p:sp>
         <p:nvSpPr>
-          <p:cNvPr id="39" name="TextBox 38"/>
+          <p:cNvPr id="45" name="TextBox 44"/>
           <p:cNvSpPr txBox="1"/>
           <p:nvPr/>
         </p:nvSpPr>
         <p:spPr>
           <a:xfrm>
-            <a:off x="4581144" y="4334256"/>
-            <a:ext cx="365760" cy="365760"/>
+            <a:off x="5458968" y="2029968"/>
+            <a:ext cx="1133856" cy="365760"/>
           </a:xfrm>
           <a:prstGeom prst="rect">
             <a:avLst/>
@@ -9043,43 +9313,27 @@
               </a:spcAft>
             </a:pPr>
             <a:r>
-              <a:rPr sz="928" b="1">
+              <a:rPr sz="928" b="0">
                 <a:solidFill>
                   <a:srgbClr val="141414"/>
                 </a:solidFill>
                 <a:latin typeface="Arial"/>
               </a:rPr>
-              <a:t>BFT</a:t>
-            </a:r>
-          </a:p>
-          <a:p>
-            <a:pPr algn="l">
-              <a:spcAft>
-                <a:spcPts val="100"/>
-              </a:spcAft>
-            </a:pPr>
-            <a:r>
-              <a:rPr sz="631" b="0">
-                <a:solidFill>
-                  <a:srgbClr val="6B6B6B"/>
-                </a:solidFill>
-                <a:latin typeface="Arial"/>
-              </a:rPr>
-              <a:t>not collected · ETCH-39584</a:t>
-            </a:r>
-          </a:p>
-        </p:txBody>
-      </p:sp>
-      <p:sp>
-        <p:nvSpPr>
-          <p:cNvPr id="40" name="Rounded Rectangle 39"/>
+              <a:t>2U ASSY</a:t>
+            </a:r>
+          </a:p>
+        </p:txBody>
+      </p:sp>
+      <p:sp>
+        <p:nvSpPr>
+          <p:cNvPr id="46" name="Rounded Rectangle 45"/>
           <p:cNvSpPr/>
           <p:nvPr/>
         </p:nvSpPr>
         <p:spPr>
           <a:xfrm>
-            <a:off x="4498848" y="5422392"/>
-            <a:ext cx="530352" cy="475488"/>
+            <a:off x="5376672" y="2542032"/>
+            <a:ext cx="1298448" cy="475488"/>
           </a:xfrm>
           <a:prstGeom prst="roundRect">
             <a:avLst/>
@@ -9118,14 +9372,14 @@
       </p:sp>
       <p:sp>
         <p:nvSpPr>
-          <p:cNvPr id="41" name="TextBox 40"/>
+          <p:cNvPr id="47" name="TextBox 46"/>
           <p:cNvSpPr txBox="1"/>
           <p:nvPr/>
         </p:nvSpPr>
         <p:spPr>
           <a:xfrm>
-            <a:off x="4581144" y="5486400"/>
-            <a:ext cx="365760" cy="365760"/>
+            <a:off x="5458968" y="2606040"/>
+            <a:ext cx="1133856" cy="365760"/>
           </a:xfrm>
           <a:prstGeom prst="rect">
             <a:avLst/>
@@ -9150,7 +9404,7 @@
                 </a:solidFill>
                 <a:latin typeface="Arial"/>
               </a:rPr>
-              <a:t>PDB CK</a:t>
+              <a:t>2U Component</a:t>
             </a:r>
           </a:p>
           <a:p>
@@ -9166,20 +9420,20 @@
                 </a:solidFill>
                 <a:latin typeface="Arial"/>
               </a:rPr>
-              <a:t>not collected</a:t>
-            </a:r>
-          </a:p>
-        </p:txBody>
-      </p:sp>
-      <p:sp>
-        <p:nvSpPr>
-          <p:cNvPr id="42" name="TextBox 41"/>
+              <a:t>counted with 2U System</a:t>
+            </a:r>
+          </a:p>
+        </p:txBody>
+      </p:sp>
+      <p:sp>
+        <p:nvSpPr>
+          <p:cNvPr id="48" name="TextBox 47"/>
           <p:cNvSpPr txBox="1"/>
           <p:nvPr/>
         </p:nvSpPr>
         <p:spPr>
           <a:xfrm>
-            <a:off x="5376672" y="877824"/>
+            <a:off x="6839712" y="877824"/>
             <a:ext cx="2743200" cy="237744"/>
           </a:xfrm>
           <a:prstGeom prst="rect">
@@ -9214,20 +9468,20 @@
                 </a:solidFill>
                 <a:latin typeface="Arial"/>
               </a:rPr>
-              <a:t>FATP L10 2U/4U</a:t>
+              <a:t>FATP L10 6U</a:t>
             </a:r>
           </a:p>
         </p:txBody>
       </p:sp>
       <p:cxnSp>
         <p:nvCxnSpPr>
-          <p:cNvPr id="43" name="Connector 42"/>
+          <p:cNvPr id="49" name="Connector 48"/>
           <p:cNvCxnSpPr/>
           <p:nvPr/>
         </p:nvCxnSpPr>
         <p:spPr>
           <a:xfrm>
-            <a:off x="6729984" y="914400"/>
+            <a:off x="9491472" y="914400"/>
             <a:ext cx="0" cy="5029200"/>
           </a:xfrm>
           <a:prstGeom prst="line">
@@ -9257,13 +9511,343 @@
       </p:cxnSp>
       <p:sp>
         <p:nvSpPr>
-          <p:cNvPr id="44" name="Rounded Rectangle 43"/>
+          <p:cNvPr id="50" name="Rounded Rectangle 49"/>
           <p:cNvSpPr/>
           <p:nvPr/>
         </p:nvSpPr>
         <p:spPr>
           <a:xfrm>
-            <a:off x="5376672" y="1389888"/>
+            <a:off x="6839712" y="1389888"/>
+            <a:ext cx="1298448" cy="475488"/>
+          </a:xfrm>
+          <a:prstGeom prst="roundRect">
+            <a:avLst/>
+          </a:prstGeom>
+          <a:solidFill>
+            <a:srgbClr val="F2ECD9"/>
+          </a:solidFill>
+          <a:ln w="12700">
+            <a:solidFill>
+              <a:srgbClr val="C9B46B"/>
+            </a:solidFill>
+          </a:ln>
+          <a:effectLst/>
+        </p:spPr>
+        <p:style>
+          <a:lnRef idx="1">
+            <a:schemeClr val="accent1"/>
+          </a:lnRef>
+          <a:fillRef idx="3">
+            <a:schemeClr val="accent1"/>
+          </a:fillRef>
+          <a:effectRef idx="2">
+            <a:schemeClr val="accent1"/>
+          </a:effectRef>
+          <a:fontRef idx="minor">
+            <a:schemeClr val="lt1"/>
+          </a:fontRef>
+        </p:style>
+        <p:txBody>
+          <a:bodyPr rtlCol="0" anchor="ctr"/>
+          <a:lstStyle/>
+          <a:p>
+            <a:pPr algn="ctr"/>
+          </a:p>
+        </p:txBody>
+      </p:sp>
+      <p:sp>
+        <p:nvSpPr>
+          <p:cNvPr id="51" name="TextBox 50"/>
+          <p:cNvSpPr txBox="1"/>
+          <p:nvPr/>
+        </p:nvSpPr>
+        <p:spPr>
+          <a:xfrm>
+            <a:off x="6922008" y="1453896"/>
+            <a:ext cx="1133856" cy="365760"/>
+          </a:xfrm>
+          <a:prstGeom prst="rect">
+            <a:avLst/>
+          </a:prstGeom>
+          <a:noFill/>
+        </p:spPr>
+        <p:txBody>
+          <a:bodyPr wrap="square" lIns="0" rIns="0" tIns="0" bIns="0">
+            <a:spAutoFit/>
+          </a:bodyPr>
+          <a:lstStyle/>
+          <a:p>
+            <a:pPr algn="l">
+              <a:spcAft>
+                <a:spcPts val="100"/>
+              </a:spcAft>
+            </a:pPr>
+            <a:r>
+              <a:rPr sz="928" b="1">
+                <a:solidFill>
+                  <a:srgbClr val="141414"/>
+                </a:solidFill>
+                <a:latin typeface="Arial"/>
+              </a:rPr>
+              <a:t>SFT</a:t>
+            </a:r>
+          </a:p>
+          <a:p>
+            <a:pPr algn="l">
+              <a:spcAft>
+                <a:spcPts val="100"/>
+              </a:spcAft>
+            </a:pPr>
+            <a:r>
+              <a:rPr sz="1188" b="1">
+                <a:solidFill>
+                  <a:srgbClr val="B3281E"/>
+                </a:solidFill>
+                <a:latin typeface="Arial"/>
+              </a:rPr>
+              <a:t>14.3%</a:t>
+            </a:r>
+            <a:r>
+              <a:rPr sz="668" b="0">
+                <a:solidFill>
+                  <a:srgbClr val="6B6B6B"/>
+                </a:solidFill>
+                <a:latin typeface="Arial"/>
+              </a:rPr>
+              <a:t>  15u*</a:t>
+            </a:r>
+          </a:p>
+        </p:txBody>
+      </p:sp>
+      <p:sp>
+        <p:nvSpPr>
+          <p:cNvPr id="52" name="Rounded Rectangle 51"/>
+          <p:cNvSpPr/>
+          <p:nvPr/>
+        </p:nvSpPr>
+        <p:spPr>
+          <a:xfrm>
+            <a:off x="6839712" y="1965960"/>
+            <a:ext cx="1298448" cy="475488"/>
+          </a:xfrm>
+          <a:prstGeom prst="roundRect">
+            <a:avLst/>
+          </a:prstGeom>
+          <a:solidFill>
+            <a:srgbClr val="F2ECD9"/>
+          </a:solidFill>
+          <a:ln w="12700">
+            <a:solidFill>
+              <a:srgbClr val="C9B46B"/>
+            </a:solidFill>
+          </a:ln>
+          <a:effectLst/>
+        </p:spPr>
+        <p:style>
+          <a:lnRef idx="1">
+            <a:schemeClr val="accent1"/>
+          </a:lnRef>
+          <a:fillRef idx="3">
+            <a:schemeClr val="accent1"/>
+          </a:fillRef>
+          <a:effectRef idx="2">
+            <a:schemeClr val="accent1"/>
+          </a:effectRef>
+          <a:fontRef idx="minor">
+            <a:schemeClr val="lt1"/>
+          </a:fontRef>
+        </p:style>
+        <p:txBody>
+          <a:bodyPr rtlCol="0" anchor="ctr"/>
+          <a:lstStyle/>
+          <a:p>
+            <a:pPr algn="ctr"/>
+          </a:p>
+        </p:txBody>
+      </p:sp>
+      <p:sp>
+        <p:nvSpPr>
+          <p:cNvPr id="53" name="TextBox 52"/>
+          <p:cNvSpPr txBox="1"/>
+          <p:nvPr/>
+        </p:nvSpPr>
+        <p:spPr>
+          <a:xfrm>
+            <a:off x="6922008" y="2029968"/>
+            <a:ext cx="1133856" cy="365760"/>
+          </a:xfrm>
+          <a:prstGeom prst="rect">
+            <a:avLst/>
+          </a:prstGeom>
+          <a:noFill/>
+        </p:spPr>
+        <p:txBody>
+          <a:bodyPr wrap="square" lIns="0" rIns="0" tIns="0" bIns="0">
+            <a:spAutoFit/>
+          </a:bodyPr>
+          <a:lstStyle/>
+          <a:p>
+            <a:pPr algn="l">
+              <a:spcAft>
+                <a:spcPts val="100"/>
+              </a:spcAft>
+            </a:pPr>
+            <a:r>
+              <a:rPr sz="928" b="1">
+                <a:solidFill>
+                  <a:srgbClr val="141414"/>
+                </a:solidFill>
+                <a:latin typeface="Arial"/>
+              </a:rPr>
+              <a:t>FAT</a:t>
+            </a:r>
+          </a:p>
+          <a:p>
+            <a:pPr algn="l">
+              <a:spcAft>
+                <a:spcPts val="100"/>
+              </a:spcAft>
+            </a:pPr>
+            <a:r>
+              <a:rPr sz="1188" b="1">
+                <a:solidFill>
+                  <a:srgbClr val="B3281E"/>
+                </a:solidFill>
+                <a:latin typeface="Arial"/>
+              </a:rPr>
+              <a:t>0.0%</a:t>
+            </a:r>
+            <a:r>
+              <a:rPr sz="668" b="0">
+                <a:solidFill>
+                  <a:srgbClr val="6B6B6B"/>
+                </a:solidFill>
+                <a:latin typeface="Arial"/>
+              </a:rPr>
+              <a:t>  16u*</a:t>
+            </a:r>
+          </a:p>
+        </p:txBody>
+      </p:sp>
+      <p:sp>
+        <p:nvSpPr>
+          <p:cNvPr id="54" name="Rounded Rectangle 53"/>
+          <p:cNvSpPr/>
+          <p:nvPr/>
+        </p:nvSpPr>
+        <p:spPr>
+          <a:xfrm>
+            <a:off x="6839712" y="2542032"/>
+            <a:ext cx="1298448" cy="475488"/>
+          </a:xfrm>
+          <a:prstGeom prst="roundRect">
+            <a:avLst/>
+          </a:prstGeom>
+          <a:solidFill>
+            <a:srgbClr val="F2ECD9"/>
+          </a:solidFill>
+          <a:ln w="12700">
+            <a:solidFill>
+              <a:srgbClr val="C9B46B"/>
+            </a:solidFill>
+          </a:ln>
+          <a:effectLst/>
+        </p:spPr>
+        <p:style>
+          <a:lnRef idx="1">
+            <a:schemeClr val="accent1"/>
+          </a:lnRef>
+          <a:fillRef idx="3">
+            <a:schemeClr val="accent1"/>
+          </a:fillRef>
+          <a:effectRef idx="2">
+            <a:schemeClr val="accent1"/>
+          </a:effectRef>
+          <a:fontRef idx="minor">
+            <a:schemeClr val="lt1"/>
+          </a:fontRef>
+        </p:style>
+        <p:txBody>
+          <a:bodyPr rtlCol="0" anchor="ctr"/>
+          <a:lstStyle/>
+          <a:p>
+            <a:pPr algn="ctr"/>
+          </a:p>
+        </p:txBody>
+      </p:sp>
+      <p:sp>
+        <p:nvSpPr>
+          <p:cNvPr id="55" name="TextBox 54"/>
+          <p:cNvSpPr txBox="1"/>
+          <p:nvPr/>
+        </p:nvSpPr>
+        <p:spPr>
+          <a:xfrm>
+            <a:off x="6922008" y="2606040"/>
+            <a:ext cx="1133856" cy="365760"/>
+          </a:xfrm>
+          <a:prstGeom prst="rect">
+            <a:avLst/>
+          </a:prstGeom>
+          <a:noFill/>
+        </p:spPr>
+        <p:txBody>
+          <a:bodyPr wrap="square" lIns="0" rIns="0" tIns="0" bIns="0">
+            <a:spAutoFit/>
+          </a:bodyPr>
+          <a:lstStyle/>
+          <a:p>
+            <a:pPr algn="l">
+              <a:spcAft>
+                <a:spcPts val="100"/>
+              </a:spcAft>
+            </a:pPr>
+            <a:r>
+              <a:rPr sz="928" b="1">
+                <a:solidFill>
+                  <a:srgbClr val="141414"/>
+                </a:solidFill>
+                <a:latin typeface="Arial"/>
+              </a:rPr>
+              <a:t>2U System</a:t>
+            </a:r>
+          </a:p>
+          <a:p>
+            <a:pPr algn="l">
+              <a:spcAft>
+                <a:spcPts val="100"/>
+              </a:spcAft>
+            </a:pPr>
+            <a:r>
+              <a:rPr sz="1188" b="1">
+                <a:solidFill>
+                  <a:srgbClr val="B3281E"/>
+                </a:solidFill>
+                <a:latin typeface="Arial"/>
+              </a:rPr>
+              <a:t>0.0%</a:t>
+            </a:r>
+            <a:r>
+              <a:rPr sz="668" b="0">
+                <a:solidFill>
+                  <a:srgbClr val="6B6B6B"/>
+                </a:solidFill>
+                <a:latin typeface="Arial"/>
+              </a:rPr>
+              <a:t>  2u*</a:t>
+            </a:r>
+          </a:p>
+        </p:txBody>
+      </p:sp>
+      <p:sp>
+        <p:nvSpPr>
+          <p:cNvPr id="56" name="Rounded Rectangle 55"/>
+          <p:cNvSpPr/>
+          <p:nvPr/>
+        </p:nvSpPr>
+        <p:spPr>
+          <a:xfrm>
+            <a:off x="6839712" y="3118104"/>
             <a:ext cx="1298448" cy="475488"/>
           </a:xfrm>
           <a:prstGeom prst="roundRect">
@@ -9303,13 +9887,13 @@
       </p:sp>
       <p:sp>
         <p:nvSpPr>
-          <p:cNvPr id="45" name="TextBox 44"/>
+          <p:cNvPr id="57" name="TextBox 56"/>
           <p:cNvSpPr txBox="1"/>
           <p:nvPr/>
         </p:nvSpPr>
         <p:spPr>
           <a:xfrm>
-            <a:off x="5458968" y="1453896"/>
+            <a:off x="6922008" y="3182112"/>
             <a:ext cx="1133856" cy="365760"/>
           </a:xfrm>
           <a:prstGeom prst="rect">
@@ -9335,21 +9919,179 @@
                 </a:solidFill>
                 <a:latin typeface="Arial"/>
               </a:rPr>
-              <a:t>4U ASSY</a:t>
-            </a:r>
-          </a:p>
-        </p:txBody>
-      </p:sp>
-      <p:sp>
-        <p:nvSpPr>
-          <p:cNvPr id="46" name="Rounded Rectangle 45"/>
+              <a:t>ASSY</a:t>
+            </a:r>
+          </a:p>
+        </p:txBody>
+      </p:sp>
+      <p:sp>
+        <p:nvSpPr>
+          <p:cNvPr id="58" name="Rounded Rectangle 57"/>
           <p:cNvSpPr/>
           <p:nvPr/>
         </p:nvSpPr>
         <p:spPr>
           <a:xfrm>
-            <a:off x="5376672" y="1965960"/>
-            <a:ext cx="1298448" cy="475488"/>
+            <a:off x="8266175" y="1389888"/>
+            <a:ext cx="1133856" cy="475488"/>
+          </a:xfrm>
+          <a:prstGeom prst="roundRect">
+            <a:avLst/>
+          </a:prstGeom>
+          <a:solidFill>
+            <a:srgbClr val="F2ECD9"/>
+          </a:solidFill>
+          <a:ln w="12700">
+            <a:solidFill>
+              <a:srgbClr val="C9B46B"/>
+            </a:solidFill>
+          </a:ln>
+          <a:effectLst/>
+        </p:spPr>
+        <p:style>
+          <a:lnRef idx="1">
+            <a:schemeClr val="accent1"/>
+          </a:lnRef>
+          <a:fillRef idx="3">
+            <a:schemeClr val="accent1"/>
+          </a:fillRef>
+          <a:effectRef idx="2">
+            <a:schemeClr val="accent1"/>
+          </a:effectRef>
+          <a:fontRef idx="minor">
+            <a:schemeClr val="lt1"/>
+          </a:fontRef>
+        </p:style>
+        <p:txBody>
+          <a:bodyPr rtlCol="0" anchor="ctr"/>
+          <a:lstStyle/>
+          <a:p>
+            <a:pPr algn="ctr"/>
+          </a:p>
+        </p:txBody>
+      </p:sp>
+      <p:sp>
+        <p:nvSpPr>
+          <p:cNvPr id="59" name="TextBox 58"/>
+          <p:cNvSpPr txBox="1"/>
+          <p:nvPr/>
+        </p:nvSpPr>
+        <p:spPr>
+          <a:xfrm>
+            <a:off x="8348471" y="1453896"/>
+            <a:ext cx="969264" cy="365760"/>
+          </a:xfrm>
+          <a:prstGeom prst="rect">
+            <a:avLst/>
+          </a:prstGeom>
+          <a:noFill/>
+        </p:spPr>
+        <p:txBody>
+          <a:bodyPr wrap="square" lIns="0" rIns="0" tIns="0" bIns="0">
+            <a:spAutoFit/>
+          </a:bodyPr>
+          <a:lstStyle/>
+          <a:p>
+            <a:pPr algn="l">
+              <a:spcAft>
+                <a:spcPts val="100"/>
+              </a:spcAft>
+            </a:pPr>
+            <a:r>
+              <a:rPr sz="928" b="1">
+                <a:solidFill>
+                  <a:srgbClr val="141414"/>
+                </a:solidFill>
+                <a:latin typeface="Arial"/>
+              </a:rPr>
+              <a:t>Runin</a:t>
+            </a:r>
+          </a:p>
+          <a:p>
+            <a:pPr algn="l">
+              <a:spcAft>
+                <a:spcPts val="100"/>
+              </a:spcAft>
+            </a:pPr>
+            <a:r>
+              <a:rPr sz="1188" b="1">
+                <a:solidFill>
+                  <a:srgbClr val="B3281E"/>
+                </a:solidFill>
+                <a:latin typeface="Arial"/>
+              </a:rPr>
+              <a:t>25.0%</a:t>
+            </a:r>
+            <a:r>
+              <a:rPr sz="668" b="0">
+                <a:solidFill>
+                  <a:srgbClr val="6B6B6B"/>
+                </a:solidFill>
+                <a:latin typeface="Arial"/>
+              </a:rPr>
+              <a:t>  5u*</a:t>
+            </a:r>
+          </a:p>
+        </p:txBody>
+      </p:sp>
+      <p:sp>
+        <p:nvSpPr>
+          <p:cNvPr id="60" name="TextBox 59"/>
+          <p:cNvSpPr txBox="1"/>
+          <p:nvPr/>
+        </p:nvSpPr>
+        <p:spPr>
+          <a:xfrm>
+            <a:off x="9601200" y="877824"/>
+            <a:ext cx="2423160" cy="237744"/>
+          </a:xfrm>
+          <a:prstGeom prst="rect">
+            <a:avLst/>
+          </a:prstGeom>
+          <a:noFill/>
+        </p:spPr>
+        <p:txBody>
+          <a:bodyPr wrap="square" lIns="0" rIns="0" tIns="0" bIns="0">
+            <a:spAutoFit/>
+          </a:bodyPr>
+          <a:lstStyle/>
+          <a:p>
+            <a:pPr algn="l">
+              <a:spcAft>
+                <a:spcPts val="0"/>
+              </a:spcAft>
+            </a:pPr>
+            <a:r>
+              <a:rPr sz="1000" b="0">
+                <a:solidFill>
+                  <a:srgbClr val="6B6B6B"/>
+                </a:solidFill>
+                <a:latin typeface="Arial"/>
+              </a:rPr>
+              <a:t/>
+            </a:r>
+            <a:r>
+              <a:rPr sz="1250" b="1">
+                <a:solidFill>
+                  <a:srgbClr val="141414"/>
+                </a:solidFill>
+                <a:latin typeface="Arial"/>
+              </a:rPr>
+              <a:t>Rack L11</a:t>
+            </a:r>
+          </a:p>
+        </p:txBody>
+      </p:sp>
+      <p:sp>
+        <p:nvSpPr>
+          <p:cNvPr id="61" name="Rounded Rectangle 60"/>
+          <p:cNvSpPr/>
+          <p:nvPr/>
+        </p:nvSpPr>
+        <p:spPr>
+          <a:xfrm>
+            <a:off x="9601200" y="1389888"/>
+            <a:ext cx="1417320" cy="475488"/>
           </a:xfrm>
           <a:prstGeom prst="roundRect">
             <a:avLst/>
@@ -9388,14 +10130,14 @@
       </p:sp>
       <p:sp>
         <p:nvSpPr>
-          <p:cNvPr id="47" name="TextBox 46"/>
+          <p:cNvPr id="62" name="TextBox 61"/>
           <p:cNvSpPr txBox="1"/>
           <p:nvPr/>
         </p:nvSpPr>
         <p:spPr>
           <a:xfrm>
-            <a:off x="5458968" y="2029968"/>
-            <a:ext cx="1133856" cy="365760"/>
+            <a:off x="9683496" y="1453896"/>
+            <a:ext cx="1252728" cy="365760"/>
           </a:xfrm>
           <a:prstGeom prst="rect">
             <a:avLst/>
@@ -9420,21 +10162,131 @@
                 </a:solidFill>
                 <a:latin typeface="Arial"/>
               </a:rPr>
-              <a:t>2U ASSY</a:t>
-            </a:r>
-          </a:p>
-        </p:txBody>
-      </p:sp>
-      <p:sp>
-        <p:nvSpPr>
-          <p:cNvPr id="48" name="Rounded Rectangle 47"/>
+              <a:t>ASSY</a:t>
+            </a:r>
+          </a:p>
+        </p:txBody>
+      </p:sp>
+      <p:sp>
+        <p:nvSpPr>
+          <p:cNvPr id="63" name="Rounded Rectangle 62"/>
           <p:cNvSpPr/>
           <p:nvPr/>
         </p:nvSpPr>
         <p:spPr>
           <a:xfrm>
-            <a:off x="5376672" y="2542032"/>
-            <a:ext cx="1298448" cy="475488"/>
+            <a:off x="9601200" y="1965960"/>
+            <a:ext cx="1417320" cy="475488"/>
+          </a:xfrm>
+          <a:prstGeom prst="roundRect">
+            <a:avLst/>
+          </a:prstGeom>
+          <a:solidFill>
+            <a:srgbClr val="F2ECD9"/>
+          </a:solidFill>
+          <a:ln w="12700">
+            <a:solidFill>
+              <a:srgbClr val="C9B46B"/>
+            </a:solidFill>
+          </a:ln>
+          <a:effectLst/>
+        </p:spPr>
+        <p:style>
+          <a:lnRef idx="1">
+            <a:schemeClr val="accent1"/>
+          </a:lnRef>
+          <a:fillRef idx="3">
+            <a:schemeClr val="accent1"/>
+          </a:fillRef>
+          <a:effectRef idx="2">
+            <a:schemeClr val="accent1"/>
+          </a:effectRef>
+          <a:fontRef idx="minor">
+            <a:schemeClr val="lt1"/>
+          </a:fontRef>
+        </p:style>
+        <p:txBody>
+          <a:bodyPr rtlCol="0" anchor="ctr"/>
+          <a:lstStyle/>
+          <a:p>
+            <a:pPr algn="ctr"/>
+          </a:p>
+        </p:txBody>
+      </p:sp>
+      <p:sp>
+        <p:nvSpPr>
+          <p:cNvPr id="64" name="TextBox 63"/>
+          <p:cNvSpPr txBox="1"/>
+          <p:nvPr/>
+        </p:nvSpPr>
+        <p:spPr>
+          <a:xfrm>
+            <a:off x="9683496" y="2029968"/>
+            <a:ext cx="1252728" cy="365760"/>
+          </a:xfrm>
+          <a:prstGeom prst="rect">
+            <a:avLst/>
+          </a:prstGeom>
+          <a:noFill/>
+        </p:spPr>
+        <p:txBody>
+          <a:bodyPr wrap="square" lIns="0" rIns="0" tIns="0" bIns="0">
+            <a:spAutoFit/>
+          </a:bodyPr>
+          <a:lstStyle/>
+          <a:p>
+            <a:pPr algn="l">
+              <a:spcAft>
+                <a:spcPts val="100"/>
+              </a:spcAft>
+            </a:pPr>
+            <a:r>
+              <a:rPr sz="928" b="1">
+                <a:solidFill>
+                  <a:srgbClr val="141414"/>
+                </a:solidFill>
+                <a:latin typeface="Arial"/>
+              </a:rPr>
+              <a:t>Provision</a:t>
+            </a:r>
+          </a:p>
+          <a:p>
+            <a:pPr algn="l">
+              <a:spcAft>
+                <a:spcPts val="100"/>
+              </a:spcAft>
+            </a:pPr>
+            <a:r>
+              <a:rPr sz="1188" b="1">
+                <a:solidFill>
+                  <a:srgbClr val="B3281E"/>
+                </a:solidFill>
+                <a:latin typeface="Arial"/>
+              </a:rPr>
+              <a:t>0.0%</a:t>
+            </a:r>
+            <a:r>
+              <a:rPr sz="668" b="0">
+                <a:solidFill>
+                  <a:srgbClr val="6B6B6B"/>
+                </a:solidFill>
+                <a:latin typeface="Arial"/>
+              </a:rPr>
+              <a:t>  1u*</a:t>
+            </a:r>
+          </a:p>
+        </p:txBody>
+      </p:sp>
+      <p:sp>
+        <p:nvSpPr>
+          <p:cNvPr id="65" name="Rounded Rectangle 64"/>
+          <p:cNvSpPr/>
+          <p:nvPr/>
+        </p:nvSpPr>
+        <p:spPr>
+          <a:xfrm>
+            <a:off x="9601200" y="2542032"/>
+            <a:ext cx="1417320" cy="475488"/>
           </a:xfrm>
           <a:prstGeom prst="roundRect">
             <a:avLst/>
@@ -9473,14 +10325,14 @@
       </p:sp>
       <p:sp>
         <p:nvSpPr>
-          <p:cNvPr id="49" name="TextBox 48"/>
+          <p:cNvPr id="66" name="TextBox 65"/>
           <p:cNvSpPr txBox="1"/>
           <p:nvPr/>
         </p:nvSpPr>
         <p:spPr>
           <a:xfrm>
-            <a:off x="5458968" y="2606040"/>
-            <a:ext cx="1133856" cy="365760"/>
+            <a:off x="9683496" y="2606040"/>
+            <a:ext cx="1252728" cy="365760"/>
           </a:xfrm>
           <a:prstGeom prst="rect">
             <a:avLst/>
@@ -9505,451 +10357,21 @@
                 </a:solidFill>
                 <a:latin typeface="Arial"/>
               </a:rPr>
-              <a:t>2U Component</a:t>
-            </a:r>
-          </a:p>
-          <a:p>
-            <a:pPr algn="l">
-              <a:spcAft>
-                <a:spcPts val="100"/>
-              </a:spcAft>
-            </a:pPr>
-            <a:r>
-              <a:rPr sz="631" b="0">
-                <a:solidFill>
-                  <a:srgbClr val="6B6B6B"/>
-                </a:solidFill>
-                <a:latin typeface="Arial"/>
-              </a:rPr>
-              <a:t>counted with 2U System</a:t>
-            </a:r>
-          </a:p>
-        </p:txBody>
-      </p:sp>
-      <p:sp>
-        <p:nvSpPr>
-          <p:cNvPr id="50" name="TextBox 49"/>
-          <p:cNvSpPr txBox="1"/>
-          <p:nvPr/>
-        </p:nvSpPr>
-        <p:spPr>
-          <a:xfrm>
-            <a:off x="6839712" y="877824"/>
-            <a:ext cx="2743200" cy="237744"/>
-          </a:xfrm>
-          <a:prstGeom prst="rect">
-            <a:avLst/>
-          </a:prstGeom>
-          <a:noFill/>
-        </p:spPr>
-        <p:txBody>
-          <a:bodyPr wrap="square" lIns="0" rIns="0" tIns="0" bIns="0">
-            <a:spAutoFit/>
-          </a:bodyPr>
-          <a:lstStyle/>
-          <a:p>
-            <a:pPr algn="l">
-              <a:spcAft>
-                <a:spcPts val="0"/>
-              </a:spcAft>
-            </a:pPr>
-            <a:r>
-              <a:rPr sz="1000" b="0">
-                <a:solidFill>
-                  <a:srgbClr val="6B6B6B"/>
-                </a:solidFill>
-                <a:latin typeface="Arial"/>
-              </a:rPr>
-              <a:t/>
-            </a:r>
-            <a:r>
-              <a:rPr sz="1250" b="1">
-                <a:solidFill>
-                  <a:srgbClr val="141414"/>
-                </a:solidFill>
-                <a:latin typeface="Arial"/>
-              </a:rPr>
-              <a:t>FATP L10 6U</a:t>
-            </a:r>
-          </a:p>
-        </p:txBody>
-      </p:sp>
-      <p:cxnSp>
-        <p:nvCxnSpPr>
-          <p:cNvPr id="51" name="Connector 50"/>
-          <p:cNvCxnSpPr/>
-          <p:nvPr/>
-        </p:nvCxnSpPr>
-        <p:spPr>
-          <a:xfrm>
-            <a:off x="9491472" y="914400"/>
-            <a:ext cx="0" cy="5029200"/>
-          </a:xfrm>
-          <a:prstGeom prst="line">
-            <a:avLst/>
-          </a:prstGeom>
-          <a:ln w="11430">
-            <a:solidFill>
-              <a:srgbClr val="B5B3AC"/>
-            </a:solidFill>
-            <a:prstDash val="dash"/>
-          </a:ln>
-        </p:spPr>
-        <p:style>
-          <a:lnRef idx="2">
-            <a:schemeClr val="accent1"/>
-          </a:lnRef>
-          <a:fillRef idx="0">
-            <a:schemeClr val="accent1"/>
-          </a:fillRef>
-          <a:effectRef idx="1">
-            <a:schemeClr val="accent1"/>
-          </a:effectRef>
-          <a:fontRef idx="minor">
-            <a:schemeClr val="tx1"/>
-          </a:fontRef>
-        </p:style>
-      </p:cxnSp>
-      <p:sp>
-        <p:nvSpPr>
-          <p:cNvPr id="52" name="Rounded Rectangle 51"/>
+              <a:t>FAT</a:t>
+            </a:r>
+          </a:p>
+        </p:txBody>
+      </p:sp>
+      <p:sp>
+        <p:nvSpPr>
+          <p:cNvPr id="67" name="Rounded Rectangle 66"/>
           <p:cNvSpPr/>
           <p:nvPr/>
         </p:nvSpPr>
         <p:spPr>
           <a:xfrm>
-            <a:off x="6839712" y="1389888"/>
-            <a:ext cx="1298448" cy="475488"/>
-          </a:xfrm>
-          <a:prstGeom prst="roundRect">
-            <a:avLst/>
-          </a:prstGeom>
-          <a:solidFill>
-            <a:srgbClr val="F2ECD9"/>
-          </a:solidFill>
-          <a:ln w="12700">
-            <a:solidFill>
-              <a:srgbClr val="C9B46B"/>
-            </a:solidFill>
-          </a:ln>
-          <a:effectLst/>
-        </p:spPr>
-        <p:style>
-          <a:lnRef idx="1">
-            <a:schemeClr val="accent1"/>
-          </a:lnRef>
-          <a:fillRef idx="3">
-            <a:schemeClr val="accent1"/>
-          </a:fillRef>
-          <a:effectRef idx="2">
-            <a:schemeClr val="accent1"/>
-          </a:effectRef>
-          <a:fontRef idx="minor">
-            <a:schemeClr val="lt1"/>
-          </a:fontRef>
-        </p:style>
-        <p:txBody>
-          <a:bodyPr rtlCol="0" anchor="ctr"/>
-          <a:lstStyle/>
-          <a:p>
-            <a:pPr algn="ctr"/>
-          </a:p>
-        </p:txBody>
-      </p:sp>
-      <p:sp>
-        <p:nvSpPr>
-          <p:cNvPr id="53" name="TextBox 52"/>
-          <p:cNvSpPr txBox="1"/>
-          <p:nvPr/>
-        </p:nvSpPr>
-        <p:spPr>
-          <a:xfrm>
-            <a:off x="6922008" y="1453896"/>
-            <a:ext cx="1133856" cy="365760"/>
-          </a:xfrm>
-          <a:prstGeom prst="rect">
-            <a:avLst/>
-          </a:prstGeom>
-          <a:noFill/>
-        </p:spPr>
-        <p:txBody>
-          <a:bodyPr wrap="square" lIns="0" rIns="0" tIns="0" bIns="0">
-            <a:spAutoFit/>
-          </a:bodyPr>
-          <a:lstStyle/>
-          <a:p>
-            <a:pPr algn="l">
-              <a:spcAft>
-                <a:spcPts val="100"/>
-              </a:spcAft>
-            </a:pPr>
-            <a:r>
-              <a:rPr sz="928" b="1">
-                <a:solidFill>
-                  <a:srgbClr val="141414"/>
-                </a:solidFill>
-                <a:latin typeface="Arial"/>
-              </a:rPr>
-              <a:t>SFT</a:t>
-            </a:r>
-          </a:p>
-          <a:p>
-            <a:pPr algn="l">
-              <a:spcAft>
-                <a:spcPts val="100"/>
-              </a:spcAft>
-            </a:pPr>
-            <a:r>
-              <a:rPr sz="1188" b="1">
-                <a:solidFill>
-                  <a:srgbClr val="B3281E"/>
-                </a:solidFill>
-                <a:latin typeface="Arial"/>
-              </a:rPr>
-              <a:t>14.3%</a:t>
-            </a:r>
-            <a:r>
-              <a:rPr sz="668" b="0">
-                <a:solidFill>
-                  <a:srgbClr val="6B6B6B"/>
-                </a:solidFill>
-                <a:latin typeface="Arial"/>
-              </a:rPr>
-              <a:t>  15u*</a:t>
-            </a:r>
-          </a:p>
-        </p:txBody>
-      </p:sp>
-      <p:sp>
-        <p:nvSpPr>
-          <p:cNvPr id="54" name="Rounded Rectangle 53"/>
-          <p:cNvSpPr/>
-          <p:nvPr/>
-        </p:nvSpPr>
-        <p:spPr>
-          <a:xfrm>
-            <a:off x="6839712" y="1965960"/>
-            <a:ext cx="1298448" cy="475488"/>
-          </a:xfrm>
-          <a:prstGeom prst="roundRect">
-            <a:avLst/>
-          </a:prstGeom>
-          <a:solidFill>
-            <a:srgbClr val="F2ECD9"/>
-          </a:solidFill>
-          <a:ln w="12700">
-            <a:solidFill>
-              <a:srgbClr val="C9B46B"/>
-            </a:solidFill>
-          </a:ln>
-          <a:effectLst/>
-        </p:spPr>
-        <p:style>
-          <a:lnRef idx="1">
-            <a:schemeClr val="accent1"/>
-          </a:lnRef>
-          <a:fillRef idx="3">
-            <a:schemeClr val="accent1"/>
-          </a:fillRef>
-          <a:effectRef idx="2">
-            <a:schemeClr val="accent1"/>
-          </a:effectRef>
-          <a:fontRef idx="minor">
-            <a:schemeClr val="lt1"/>
-          </a:fontRef>
-        </p:style>
-        <p:txBody>
-          <a:bodyPr rtlCol="0" anchor="ctr"/>
-          <a:lstStyle/>
-          <a:p>
-            <a:pPr algn="ctr"/>
-          </a:p>
-        </p:txBody>
-      </p:sp>
-      <p:sp>
-        <p:nvSpPr>
-          <p:cNvPr id="55" name="TextBox 54"/>
-          <p:cNvSpPr txBox="1"/>
-          <p:nvPr/>
-        </p:nvSpPr>
-        <p:spPr>
-          <a:xfrm>
-            <a:off x="6922008" y="2029968"/>
-            <a:ext cx="1133856" cy="365760"/>
-          </a:xfrm>
-          <a:prstGeom prst="rect">
-            <a:avLst/>
-          </a:prstGeom>
-          <a:noFill/>
-        </p:spPr>
-        <p:txBody>
-          <a:bodyPr wrap="square" lIns="0" rIns="0" tIns="0" bIns="0">
-            <a:spAutoFit/>
-          </a:bodyPr>
-          <a:lstStyle/>
-          <a:p>
-            <a:pPr algn="l">
-              <a:spcAft>
-                <a:spcPts val="100"/>
-              </a:spcAft>
-            </a:pPr>
-            <a:r>
-              <a:rPr sz="928" b="1">
-                <a:solidFill>
-                  <a:srgbClr val="141414"/>
-                </a:solidFill>
-                <a:latin typeface="Arial"/>
-              </a:rPr>
-              <a:t>FAT</a:t>
-            </a:r>
-          </a:p>
-          <a:p>
-            <a:pPr algn="l">
-              <a:spcAft>
-                <a:spcPts val="100"/>
-              </a:spcAft>
-            </a:pPr>
-            <a:r>
-              <a:rPr sz="1188" b="1">
-                <a:solidFill>
-                  <a:srgbClr val="B3281E"/>
-                </a:solidFill>
-                <a:latin typeface="Arial"/>
-              </a:rPr>
-              <a:t>0.0%</a:t>
-            </a:r>
-            <a:r>
-              <a:rPr sz="668" b="0">
-                <a:solidFill>
-                  <a:srgbClr val="6B6B6B"/>
-                </a:solidFill>
-                <a:latin typeface="Arial"/>
-              </a:rPr>
-              <a:t>  16u*</a:t>
-            </a:r>
-          </a:p>
-        </p:txBody>
-      </p:sp>
-      <p:sp>
-        <p:nvSpPr>
-          <p:cNvPr id="56" name="Rounded Rectangle 55"/>
-          <p:cNvSpPr/>
-          <p:nvPr/>
-        </p:nvSpPr>
-        <p:spPr>
-          <a:xfrm>
-            <a:off x="6839712" y="2542032"/>
-            <a:ext cx="1298448" cy="475488"/>
-          </a:xfrm>
-          <a:prstGeom prst="roundRect">
-            <a:avLst/>
-          </a:prstGeom>
-          <a:solidFill>
-            <a:srgbClr val="F2ECD9"/>
-          </a:solidFill>
-          <a:ln w="12700">
-            <a:solidFill>
-              <a:srgbClr val="C9B46B"/>
-            </a:solidFill>
-          </a:ln>
-          <a:effectLst/>
-        </p:spPr>
-        <p:style>
-          <a:lnRef idx="1">
-            <a:schemeClr val="accent1"/>
-          </a:lnRef>
-          <a:fillRef idx="3">
-            <a:schemeClr val="accent1"/>
-          </a:fillRef>
-          <a:effectRef idx="2">
-            <a:schemeClr val="accent1"/>
-          </a:effectRef>
-          <a:fontRef idx="minor">
-            <a:schemeClr val="lt1"/>
-          </a:fontRef>
-        </p:style>
-        <p:txBody>
-          <a:bodyPr rtlCol="0" anchor="ctr"/>
-          <a:lstStyle/>
-          <a:p>
-            <a:pPr algn="ctr"/>
-          </a:p>
-        </p:txBody>
-      </p:sp>
-      <p:sp>
-        <p:nvSpPr>
-          <p:cNvPr id="57" name="TextBox 56"/>
-          <p:cNvSpPr txBox="1"/>
-          <p:nvPr/>
-        </p:nvSpPr>
-        <p:spPr>
-          <a:xfrm>
-            <a:off x="6922008" y="2606040"/>
-            <a:ext cx="1133856" cy="365760"/>
-          </a:xfrm>
-          <a:prstGeom prst="rect">
-            <a:avLst/>
-          </a:prstGeom>
-          <a:noFill/>
-        </p:spPr>
-        <p:txBody>
-          <a:bodyPr wrap="square" lIns="0" rIns="0" tIns="0" bIns="0">
-            <a:spAutoFit/>
-          </a:bodyPr>
-          <a:lstStyle/>
-          <a:p>
-            <a:pPr algn="l">
-              <a:spcAft>
-                <a:spcPts val="100"/>
-              </a:spcAft>
-            </a:pPr>
-            <a:r>
-              <a:rPr sz="928" b="1">
-                <a:solidFill>
-                  <a:srgbClr val="141414"/>
-                </a:solidFill>
-                <a:latin typeface="Arial"/>
-              </a:rPr>
-              <a:t>2U System</a:t>
-            </a:r>
-          </a:p>
-          <a:p>
-            <a:pPr algn="l">
-              <a:spcAft>
-                <a:spcPts val="100"/>
-              </a:spcAft>
-            </a:pPr>
-            <a:r>
-              <a:rPr sz="1188" b="1">
-                <a:solidFill>
-                  <a:srgbClr val="B3281E"/>
-                </a:solidFill>
-                <a:latin typeface="Arial"/>
-              </a:rPr>
-              <a:t>0.0%</a:t>
-            </a:r>
-            <a:r>
-              <a:rPr sz="668" b="0">
-                <a:solidFill>
-                  <a:srgbClr val="6B6B6B"/>
-                </a:solidFill>
-                <a:latin typeface="Arial"/>
-              </a:rPr>
-              <a:t>  2u*</a:t>
-            </a:r>
-          </a:p>
-        </p:txBody>
-      </p:sp>
-      <p:sp>
-        <p:nvSpPr>
-          <p:cNvPr id="58" name="Rounded Rectangle 57"/>
-          <p:cNvSpPr/>
-          <p:nvPr/>
-        </p:nvSpPr>
-        <p:spPr>
-          <a:xfrm>
-            <a:off x="6839712" y="3118104"/>
-            <a:ext cx="1298448" cy="475488"/>
+            <a:off x="9601200" y="3118104"/>
+            <a:ext cx="1417320" cy="475488"/>
           </a:xfrm>
           <a:prstGeom prst="roundRect">
             <a:avLst/>
@@ -9988,14 +10410,14 @@
       </p:sp>
       <p:sp>
         <p:nvSpPr>
-          <p:cNvPr id="59" name="TextBox 58"/>
+          <p:cNvPr id="68" name="TextBox 67"/>
           <p:cNvSpPr txBox="1"/>
           <p:nvPr/>
         </p:nvSpPr>
         <p:spPr>
           <a:xfrm>
-            <a:off x="6922008" y="3182112"/>
-            <a:ext cx="1133856" cy="365760"/>
+            <a:off x="9683496" y="3182112"/>
+            <a:ext cx="1252728" cy="365760"/>
           </a:xfrm>
           <a:prstGeom prst="rect">
             <a:avLst/>
@@ -10014,84 +10436,15 @@
               </a:spcAft>
             </a:pPr>
             <a:r>
-              <a:rPr sz="928" b="0">
+              <a:rPr sz="928" b="1">
                 <a:solidFill>
                   <a:srgbClr val="141414"/>
                 </a:solidFill>
                 <a:latin typeface="Arial"/>
               </a:rPr>
-              <a:t>ASSY</a:t>
-            </a:r>
-          </a:p>
-        </p:txBody>
-      </p:sp>
-      <p:sp>
-        <p:nvSpPr>
-          <p:cNvPr id="60" name="Rounded Rectangle 59"/>
-          <p:cNvSpPr/>
-          <p:nvPr/>
-        </p:nvSpPr>
-        <p:spPr>
-          <a:xfrm>
-            <a:off x="8266175" y="1389888"/>
-            <a:ext cx="1133856" cy="475488"/>
-          </a:xfrm>
-          <a:prstGeom prst="roundRect">
-            <a:avLst/>
-          </a:prstGeom>
-          <a:solidFill>
-            <a:srgbClr val="F2ECD9"/>
-          </a:solidFill>
-          <a:ln w="12700">
-            <a:solidFill>
-              <a:srgbClr val="C9B46B"/>
-            </a:solidFill>
-          </a:ln>
-          <a:effectLst/>
-        </p:spPr>
-        <p:style>
-          <a:lnRef idx="1">
-            <a:schemeClr val="accent1"/>
-          </a:lnRef>
-          <a:fillRef idx="3">
-            <a:schemeClr val="accent1"/>
-          </a:fillRef>
-          <a:effectRef idx="2">
-            <a:schemeClr val="accent1"/>
-          </a:effectRef>
-          <a:fontRef idx="minor">
-            <a:schemeClr val="lt1"/>
-          </a:fontRef>
-        </p:style>
-        <p:txBody>
-          <a:bodyPr rtlCol="0" anchor="ctr"/>
-          <a:lstStyle/>
-          <a:p>
-            <a:pPr algn="ctr"/>
-          </a:p>
-        </p:txBody>
-      </p:sp>
-      <p:sp>
-        <p:nvSpPr>
-          <p:cNvPr id="61" name="TextBox 60"/>
-          <p:cNvSpPr txBox="1"/>
-          <p:nvPr/>
-        </p:nvSpPr>
-        <p:spPr>
-          <a:xfrm>
-            <a:off x="8348471" y="1453896"/>
-            <a:ext cx="969264" cy="365760"/>
-          </a:xfrm>
-          <a:prstGeom prst="rect">
-            <a:avLst/>
-          </a:prstGeom>
-          <a:noFill/>
-        </p:spPr>
-        <p:txBody>
-          <a:bodyPr wrap="square" lIns="0" rIns="0" tIns="0" bIns="0">
-            <a:spAutoFit/>
-          </a:bodyPr>
-          <a:lstStyle/>
+              <a:t>SFT</a:t>
+            </a:r>
+          </a:p>
           <a:p>
             <a:pPr algn="l">
               <a:spcAft>
@@ -10099,99 +10452,26 @@
               </a:spcAft>
             </a:pPr>
             <a:r>
-              <a:rPr sz="928" b="1">
-                <a:solidFill>
-                  <a:srgbClr val="141414"/>
-                </a:solidFill>
-                <a:latin typeface="Arial"/>
-              </a:rPr>
-              <a:t>Runin</a:t>
-            </a:r>
-          </a:p>
-          <a:p>
-            <a:pPr algn="l">
-              <a:spcAft>
-                <a:spcPts val="100"/>
-              </a:spcAft>
-            </a:pPr>
-            <a:r>
-              <a:rPr sz="1188" b="1">
-                <a:solidFill>
-                  <a:srgbClr val="B3281E"/>
-                </a:solidFill>
-                <a:latin typeface="Arial"/>
-              </a:rPr>
-              <a:t>25.0%</a:t>
-            </a:r>
-            <a:r>
-              <a:rPr sz="668" b="0">
+              <a:rPr sz="631" b="0">
                 <a:solidFill>
                   <a:srgbClr val="6B6B6B"/>
                 </a:solidFill>
                 <a:latin typeface="Arial"/>
               </a:rPr>
-              <a:t>  5u*</a:t>
-            </a:r>
-          </a:p>
-        </p:txBody>
-      </p:sp>
-      <p:sp>
-        <p:nvSpPr>
-          <p:cNvPr id="62" name="TextBox 61"/>
-          <p:cNvSpPr txBox="1"/>
-          <p:nvPr/>
-        </p:nvSpPr>
-        <p:spPr>
-          <a:xfrm>
-            <a:off x="9601200" y="877824"/>
-            <a:ext cx="2423160" cy="237744"/>
-          </a:xfrm>
-          <a:prstGeom prst="rect">
-            <a:avLst/>
-          </a:prstGeom>
-          <a:noFill/>
-        </p:spPr>
-        <p:txBody>
-          <a:bodyPr wrap="square" lIns="0" rIns="0" tIns="0" bIns="0">
-            <a:spAutoFit/>
-          </a:bodyPr>
-          <a:lstStyle/>
-          <a:p>
-            <a:pPr algn="l">
-              <a:spcAft>
-                <a:spcPts val="0"/>
-              </a:spcAft>
-            </a:pPr>
-            <a:r>
-              <a:rPr sz="1000" b="0">
-                <a:solidFill>
-                  <a:srgbClr val="6B6B6B"/>
-                </a:solidFill>
-                <a:latin typeface="Arial"/>
-              </a:rPr>
-              <a:t/>
-            </a:r>
-            <a:r>
-              <a:rPr sz="1250" b="1">
-                <a:solidFill>
-                  <a:srgbClr val="141414"/>
-                </a:solidFill>
-                <a:latin typeface="Arial"/>
-              </a:rPr>
-              <a:t>Rack L11</a:t>
-            </a:r>
-          </a:p>
-        </p:txBody>
-      </p:sp>
-      <p:sp>
-        <p:nvSpPr>
-          <p:cNvPr id="63" name="Rounded Rectangle 62"/>
+              <a:t>counted with FAT</a:t>
+            </a:r>
+          </a:p>
+        </p:txBody>
+      </p:sp>
+      <p:sp>
+        <p:nvSpPr>
+          <p:cNvPr id="69" name="Rounded Rectangle 68"/>
           <p:cNvSpPr/>
           <p:nvPr/>
         </p:nvSpPr>
         <p:spPr>
           <a:xfrm>
-            <a:off x="9601200" y="1389888"/>
+            <a:off x="9601200" y="3694176"/>
             <a:ext cx="1417320" cy="475488"/>
           </a:xfrm>
           <a:prstGeom prst="roundRect">
@@ -10231,13 +10511,13 @@
       </p:sp>
       <p:sp>
         <p:nvSpPr>
-          <p:cNvPr id="64" name="TextBox 63"/>
+          <p:cNvPr id="70" name="TextBox 69"/>
           <p:cNvSpPr txBox="1"/>
           <p:nvPr/>
         </p:nvSpPr>
         <p:spPr>
           <a:xfrm>
-            <a:off x="9683496" y="1453896"/>
+            <a:off x="9683496" y="3758184"/>
             <a:ext cx="1252728" cy="365760"/>
           </a:xfrm>
           <a:prstGeom prst="rect">
@@ -10257,84 +10537,15 @@
               </a:spcAft>
             </a:pPr>
             <a:r>
-              <a:rPr sz="928" b="0">
+              <a:rPr sz="928" b="1">
                 <a:solidFill>
                   <a:srgbClr val="141414"/>
                 </a:solidFill>
                 <a:latin typeface="Arial"/>
               </a:rPr>
-              <a:t>ASSY</a:t>
-            </a:r>
-          </a:p>
-        </p:txBody>
-      </p:sp>
-      <p:sp>
-        <p:nvSpPr>
-          <p:cNvPr id="65" name="Rounded Rectangle 64"/>
-          <p:cNvSpPr/>
-          <p:nvPr/>
-        </p:nvSpPr>
-        <p:spPr>
-          <a:xfrm>
-            <a:off x="9601200" y="1965960"/>
-            <a:ext cx="1417320" cy="475488"/>
-          </a:xfrm>
-          <a:prstGeom prst="roundRect">
-            <a:avLst/>
-          </a:prstGeom>
-          <a:solidFill>
-            <a:srgbClr val="F2ECD9"/>
-          </a:solidFill>
-          <a:ln w="12700">
-            <a:solidFill>
-              <a:srgbClr val="C9B46B"/>
-            </a:solidFill>
-          </a:ln>
-          <a:effectLst/>
-        </p:spPr>
-        <p:style>
-          <a:lnRef idx="1">
-            <a:schemeClr val="accent1"/>
-          </a:lnRef>
-          <a:fillRef idx="3">
-            <a:schemeClr val="accent1"/>
-          </a:fillRef>
-          <a:effectRef idx="2">
-            <a:schemeClr val="accent1"/>
-          </a:effectRef>
-          <a:fontRef idx="minor">
-            <a:schemeClr val="lt1"/>
-          </a:fontRef>
-        </p:style>
-        <p:txBody>
-          <a:bodyPr rtlCol="0" anchor="ctr"/>
-          <a:lstStyle/>
-          <a:p>
-            <a:pPr algn="ctr"/>
-          </a:p>
-        </p:txBody>
-      </p:sp>
-      <p:sp>
-        <p:nvSpPr>
-          <p:cNvPr id="66" name="TextBox 65"/>
-          <p:cNvSpPr txBox="1"/>
-          <p:nvPr/>
-        </p:nvSpPr>
-        <p:spPr>
-          <a:xfrm>
-            <a:off x="9683496" y="2029968"/>
-            <a:ext cx="1252728" cy="365760"/>
-          </a:xfrm>
-          <a:prstGeom prst="rect">
-            <a:avLst/>
-          </a:prstGeom>
-          <a:noFill/>
-        </p:spPr>
-        <p:txBody>
-          <a:bodyPr wrap="square" lIns="0" rIns="0" tIns="0" bIns="0">
-            <a:spAutoFit/>
-          </a:bodyPr>
-          <a:lstStyle/>
+              <a:t>Runin</a:t>
+            </a:r>
+          </a:p>
           <a:p>
             <a:pPr algn="l">
               <a:spcAft>
@@ -10342,223 +10553,12 @@
               </a:spcAft>
             </a:pPr>
             <a:r>
-              <a:rPr sz="928" b="1">
-                <a:solidFill>
-                  <a:srgbClr val="141414"/>
-                </a:solidFill>
-                <a:latin typeface="Arial"/>
-              </a:rPr>
-              <a:t>Provision</a:t>
-            </a:r>
-          </a:p>
-          <a:p>
-            <a:pPr algn="l">
-              <a:spcAft>
-                <a:spcPts val="100"/>
-              </a:spcAft>
-            </a:pPr>
-            <a:r>
-              <a:rPr sz="1188" b="1">
-                <a:solidFill>
-                  <a:srgbClr val="B3281E"/>
-                </a:solidFill>
-                <a:latin typeface="Arial"/>
-              </a:rPr>
-              <a:t>0.0%</a:t>
-            </a:r>
-            <a:r>
-              <a:rPr sz="668" b="0">
+              <a:rPr sz="631" b="0">
                 <a:solidFill>
                   <a:srgbClr val="6B6B6B"/>
                 </a:solidFill>
                 <a:latin typeface="Arial"/>
               </a:rPr>
-              <a:t>  1u*</a:t>
-            </a:r>
-          </a:p>
-        </p:txBody>
-      </p:sp>
-      <p:sp>
-        <p:nvSpPr>
-          <p:cNvPr id="67" name="Rounded Rectangle 66"/>
-          <p:cNvSpPr/>
-          <p:nvPr/>
-        </p:nvSpPr>
-        <p:spPr>
-          <a:xfrm>
-            <a:off x="9601200" y="2542032"/>
-            <a:ext cx="1417320" cy="475488"/>
-          </a:xfrm>
-          <a:prstGeom prst="roundRect">
-            <a:avLst/>
-          </a:prstGeom>
-          <a:solidFill>
-            <a:srgbClr val="D9D9D9"/>
-          </a:solidFill>
-          <a:ln w="12700">
-            <a:solidFill>
-              <a:srgbClr val="A5A5A5"/>
-            </a:solidFill>
-          </a:ln>
-          <a:effectLst/>
-        </p:spPr>
-        <p:style>
-          <a:lnRef idx="1">
-            <a:schemeClr val="accent1"/>
-          </a:lnRef>
-          <a:fillRef idx="3">
-            <a:schemeClr val="accent1"/>
-          </a:fillRef>
-          <a:effectRef idx="2">
-            <a:schemeClr val="accent1"/>
-          </a:effectRef>
-          <a:fontRef idx="minor">
-            <a:schemeClr val="lt1"/>
-          </a:fontRef>
-        </p:style>
-        <p:txBody>
-          <a:bodyPr rtlCol="0" anchor="ctr"/>
-          <a:lstStyle/>
-          <a:p>
-            <a:pPr algn="ctr"/>
-          </a:p>
-        </p:txBody>
-      </p:sp>
-      <p:sp>
-        <p:nvSpPr>
-          <p:cNvPr id="68" name="TextBox 67"/>
-          <p:cNvSpPr txBox="1"/>
-          <p:nvPr/>
-        </p:nvSpPr>
-        <p:spPr>
-          <a:xfrm>
-            <a:off x="9683496" y="2606040"/>
-            <a:ext cx="1252728" cy="365760"/>
-          </a:xfrm>
-          <a:prstGeom prst="rect">
-            <a:avLst/>
-          </a:prstGeom>
-          <a:noFill/>
-        </p:spPr>
-        <p:txBody>
-          <a:bodyPr wrap="square" lIns="0" rIns="0" tIns="0" bIns="0">
-            <a:spAutoFit/>
-          </a:bodyPr>
-          <a:lstStyle/>
-          <a:p>
-            <a:pPr algn="l">
-              <a:spcAft>
-                <a:spcPts val="100"/>
-              </a:spcAft>
-            </a:pPr>
-            <a:r>
-              <a:rPr sz="928" b="1">
-                <a:solidFill>
-                  <a:srgbClr val="141414"/>
-                </a:solidFill>
-                <a:latin typeface="Arial"/>
-              </a:rPr>
-              <a:t>FAT</a:t>
-            </a:r>
-          </a:p>
-        </p:txBody>
-      </p:sp>
-      <p:sp>
-        <p:nvSpPr>
-          <p:cNvPr id="69" name="Rounded Rectangle 68"/>
-          <p:cNvSpPr/>
-          <p:nvPr/>
-        </p:nvSpPr>
-        <p:spPr>
-          <a:xfrm>
-            <a:off x="9601200" y="3118104"/>
-            <a:ext cx="1417320" cy="475488"/>
-          </a:xfrm>
-          <a:prstGeom prst="roundRect">
-            <a:avLst/>
-          </a:prstGeom>
-          <a:solidFill>
-            <a:srgbClr val="D9D9D9"/>
-          </a:solidFill>
-          <a:ln w="12700">
-            <a:solidFill>
-              <a:srgbClr val="A5A5A5"/>
-            </a:solidFill>
-          </a:ln>
-          <a:effectLst/>
-        </p:spPr>
-        <p:style>
-          <a:lnRef idx="1">
-            <a:schemeClr val="accent1"/>
-          </a:lnRef>
-          <a:fillRef idx="3">
-            <a:schemeClr val="accent1"/>
-          </a:fillRef>
-          <a:effectRef idx="2">
-            <a:schemeClr val="accent1"/>
-          </a:effectRef>
-          <a:fontRef idx="minor">
-            <a:schemeClr val="lt1"/>
-          </a:fontRef>
-        </p:style>
-        <p:txBody>
-          <a:bodyPr rtlCol="0" anchor="ctr"/>
-          <a:lstStyle/>
-          <a:p>
-            <a:pPr algn="ctr"/>
-          </a:p>
-        </p:txBody>
-      </p:sp>
-      <p:sp>
-        <p:nvSpPr>
-          <p:cNvPr id="70" name="TextBox 69"/>
-          <p:cNvSpPr txBox="1"/>
-          <p:nvPr/>
-        </p:nvSpPr>
-        <p:spPr>
-          <a:xfrm>
-            <a:off x="9683496" y="3182112"/>
-            <a:ext cx="1252728" cy="365760"/>
-          </a:xfrm>
-          <a:prstGeom prst="rect">
-            <a:avLst/>
-          </a:prstGeom>
-          <a:noFill/>
-        </p:spPr>
-        <p:txBody>
-          <a:bodyPr wrap="square" lIns="0" rIns="0" tIns="0" bIns="0">
-            <a:spAutoFit/>
-          </a:bodyPr>
-          <a:lstStyle/>
-          <a:p>
-            <a:pPr algn="l">
-              <a:spcAft>
-                <a:spcPts val="100"/>
-              </a:spcAft>
-            </a:pPr>
-            <a:r>
-              <a:rPr sz="928" b="1">
-                <a:solidFill>
-                  <a:srgbClr val="141414"/>
-                </a:solidFill>
-                <a:latin typeface="Arial"/>
-              </a:rPr>
-              <a:t>SFT</a:t>
-            </a:r>
-          </a:p>
-          <a:p>
-            <a:pPr algn="l">
-              <a:spcAft>
-                <a:spcPts val="100"/>
-              </a:spcAft>
-            </a:pPr>
-            <a:r>
-              <a:rPr sz="631" b="0">
-                <a:solidFill>
-                  <a:srgbClr val="6B6B6B"/>
-                </a:solidFill>
-                <a:latin typeface="Arial"/>
-              </a:rPr>
               <a:t>counted with FAT</a:t>
             </a:r>
           </a:p>
@@ -10567,107 +10567,6 @@
       <p:sp>
         <p:nvSpPr>
           <p:cNvPr id="71" name="Rounded Rectangle 70"/>
-          <p:cNvSpPr/>
-          <p:nvPr/>
-        </p:nvSpPr>
-        <p:spPr>
-          <a:xfrm>
-            <a:off x="9601200" y="3694176"/>
-            <a:ext cx="1417320" cy="475488"/>
-          </a:xfrm>
-          <a:prstGeom prst="roundRect">
-            <a:avLst/>
-          </a:prstGeom>
-          <a:solidFill>
-            <a:srgbClr val="D9D9D9"/>
-          </a:solidFill>
-          <a:ln w="12700">
-            <a:solidFill>
-              <a:srgbClr val="A5A5A5"/>
-            </a:solidFill>
-          </a:ln>
-          <a:effectLst/>
-        </p:spPr>
-        <p:style>
-          <a:lnRef idx="1">
-            <a:schemeClr val="accent1"/>
-          </a:lnRef>
-          <a:fillRef idx="3">
-            <a:schemeClr val="accent1"/>
-          </a:fillRef>
-          <a:effectRef idx="2">
-            <a:schemeClr val="accent1"/>
-          </a:effectRef>
-          <a:fontRef idx="minor">
-            <a:schemeClr val="lt1"/>
-          </a:fontRef>
-        </p:style>
-        <p:txBody>
-          <a:bodyPr rtlCol="0" anchor="ctr"/>
-          <a:lstStyle/>
-          <a:p>
-            <a:pPr algn="ctr"/>
-          </a:p>
-        </p:txBody>
-      </p:sp>
-      <p:sp>
-        <p:nvSpPr>
-          <p:cNvPr id="72" name="TextBox 71"/>
-          <p:cNvSpPr txBox="1"/>
-          <p:nvPr/>
-        </p:nvSpPr>
-        <p:spPr>
-          <a:xfrm>
-            <a:off x="9683496" y="3758184"/>
-            <a:ext cx="1252728" cy="365760"/>
-          </a:xfrm>
-          <a:prstGeom prst="rect">
-            <a:avLst/>
-          </a:prstGeom>
-          <a:noFill/>
-        </p:spPr>
-        <p:txBody>
-          <a:bodyPr wrap="square" lIns="0" rIns="0" tIns="0" bIns="0">
-            <a:spAutoFit/>
-          </a:bodyPr>
-          <a:lstStyle/>
-          <a:p>
-            <a:pPr algn="l">
-              <a:spcAft>
-                <a:spcPts val="100"/>
-              </a:spcAft>
-            </a:pPr>
-            <a:r>
-              <a:rPr sz="928" b="1">
-                <a:solidFill>
-                  <a:srgbClr val="141414"/>
-                </a:solidFill>
-                <a:latin typeface="Arial"/>
-              </a:rPr>
-              <a:t>Runin</a:t>
-            </a:r>
-          </a:p>
-          <a:p>
-            <a:pPr algn="l">
-              <a:spcAft>
-                <a:spcPts val="100"/>
-              </a:spcAft>
-            </a:pPr>
-            <a:r>
-              <a:rPr sz="631" b="0">
-                <a:solidFill>
-                  <a:srgbClr val="6B6B6B"/>
-                </a:solidFill>
-                <a:latin typeface="Arial"/>
-              </a:rPr>
-              <a:t>counted with FAT</a:t>
-            </a:r>
-          </a:p>
-        </p:txBody>
-      </p:sp>
-      <p:sp>
-        <p:nvSpPr>
-          <p:cNvPr id="73" name="Rounded Rectangle 72"/>
           <p:cNvSpPr/>
           <p:nvPr/>
         </p:nvSpPr>
@@ -10713,7 +10612,7 @@
       </p:sp>
       <p:sp>
         <p:nvSpPr>
-          <p:cNvPr id="74" name="TextBox 73"/>
+          <p:cNvPr id="72" name="TextBox 71"/>
           <p:cNvSpPr txBox="1"/>
           <p:nvPr/>
         </p:nvSpPr>
@@ -10752,7 +10651,7 @@
       </p:sp>
       <p:cxnSp>
         <p:nvCxnSpPr>
-          <p:cNvPr id="75" name="Connector 74"/>
+          <p:cNvPr id="73" name="Connector 72"/>
           <p:cNvCxnSpPr/>
           <p:nvPr/>
         </p:nvCxnSpPr>
@@ -10788,7 +10687,7 @@
       </p:cxnSp>
       <p:cxnSp>
         <p:nvCxnSpPr>
-          <p:cNvPr id="76" name="Connector 75"/>
+          <p:cNvPr id="74" name="Connector 73"/>
           <p:cNvCxnSpPr/>
           <p:nvPr/>
         </p:nvCxnSpPr>
@@ -10824,7 +10723,7 @@
       </p:cxnSp>
       <p:cxnSp>
         <p:nvCxnSpPr>
-          <p:cNvPr id="77" name="Connector 76"/>
+          <p:cNvPr id="75" name="Connector 74"/>
           <p:cNvCxnSpPr/>
           <p:nvPr/>
         </p:nvCxnSpPr>
@@ -10860,7 +10759,7 @@
       </p:cxnSp>
       <p:cxnSp>
         <p:nvCxnSpPr>
-          <p:cNvPr id="78" name="Connector 77"/>
+          <p:cNvPr id="76" name="Connector 75"/>
           <p:cNvCxnSpPr/>
           <p:nvPr/>
         </p:nvCxnSpPr>
@@ -10876,6 +10775,78 @@
             <a:solidFill>
               <a:srgbClr val="8A8882"/>
             </a:solidFill>
+          </a:ln>
+        </p:spPr>
+        <p:style>
+          <a:lnRef idx="2">
+            <a:schemeClr val="accent1"/>
+          </a:lnRef>
+          <a:fillRef idx="0">
+            <a:schemeClr val="accent1"/>
+          </a:fillRef>
+          <a:effectRef idx="1">
+            <a:schemeClr val="accent1"/>
+          </a:effectRef>
+          <a:fontRef idx="minor">
+            <a:schemeClr val="tx1"/>
+          </a:fontRef>
+        </p:style>
+      </p:cxnSp>
+      <p:cxnSp>
+        <p:nvCxnSpPr>
+          <p:cNvPr id="77" name="Connector 76"/>
+          <p:cNvCxnSpPr/>
+          <p:nvPr/>
+        </p:nvCxnSpPr>
+        <p:spPr>
+          <a:xfrm>
+            <a:off x="2487168" y="2779776"/>
+            <a:ext cx="0" cy="1490472"/>
+          </a:xfrm>
+          <a:prstGeom prst="line">
+            <a:avLst/>
+          </a:prstGeom>
+          <a:ln w="13970">
+            <a:solidFill>
+              <a:srgbClr val="8A8882"/>
+            </a:solidFill>
+            <a:tailEnd type="triangle" w="sm" len="sm"/>
+          </a:ln>
+        </p:spPr>
+        <p:style>
+          <a:lnRef idx="2">
+            <a:schemeClr val="accent1"/>
+          </a:lnRef>
+          <a:fillRef idx="0">
+            <a:schemeClr val="accent1"/>
+          </a:fillRef>
+          <a:effectRef idx="1">
+            <a:schemeClr val="accent1"/>
+          </a:effectRef>
+          <a:fontRef idx="minor">
+            <a:schemeClr val="tx1"/>
+          </a:fontRef>
+        </p:style>
+      </p:cxnSp>
+      <p:cxnSp>
+        <p:nvCxnSpPr>
+          <p:cNvPr id="78" name="Connector 77"/>
+          <p:cNvCxnSpPr/>
+          <p:nvPr/>
+        </p:nvCxnSpPr>
+        <p:spPr>
+          <a:xfrm>
+            <a:off x="3054096" y="4507992"/>
+            <a:ext cx="128016" cy="0"/>
+          </a:xfrm>
+          <a:prstGeom prst="line">
+            <a:avLst/>
+          </a:prstGeom>
+          <a:ln w="13970">
+            <a:solidFill>
+              <a:srgbClr val="8A8882"/>
+            </a:solidFill>
+            <a:tailEnd type="triangle" w="sm" len="sm"/>
           </a:ln>
         </p:spPr>
         <p:style>
@@ -10900,9 +10871,9 @@
           <p:nvPr/>
         </p:nvCxnSpPr>
         <p:spPr>
-          <a:xfrm>
-            <a:off x="2487168" y="2779776"/>
-            <a:ext cx="0" cy="1490472"/>
+          <a:xfrm flipV="1">
+            <a:off x="3776472" y="4169664"/>
+            <a:ext cx="0" cy="100584"/>
           </a:xfrm>
           <a:prstGeom prst="line">
             <a:avLst/>
@@ -10936,9 +10907,9 @@
           <p:nvPr/>
         </p:nvCxnSpPr>
         <p:spPr>
-          <a:xfrm>
-            <a:off x="3054096" y="4507992"/>
-            <a:ext cx="128016" cy="0"/>
+          <a:xfrm flipV="1">
+            <a:off x="3776472" y="3593592"/>
+            <a:ext cx="0" cy="100584"/>
           </a:xfrm>
           <a:prstGeom prst="line">
             <a:avLst/>
@@ -10973,7 +10944,7 @@
         </p:nvCxnSpPr>
         <p:spPr>
           <a:xfrm flipV="1">
-            <a:off x="3776472" y="4169664"/>
+            <a:off x="3776472" y="3017520"/>
             <a:ext cx="0" cy="100584"/>
           </a:xfrm>
           <a:prstGeom prst="line">
@@ -11009,8 +10980,43 @@
         </p:nvCxnSpPr>
         <p:spPr>
           <a:xfrm flipV="1">
-            <a:off x="3776472" y="3593592"/>
-            <a:ext cx="0" cy="100584"/>
+            <a:off x="3776472" y="1627632"/>
+            <a:ext cx="0" cy="914400"/>
+          </a:xfrm>
+          <a:prstGeom prst="line">
+            <a:avLst/>
+          </a:prstGeom>
+          <a:ln w="13970">
+            <a:solidFill>
+              <a:srgbClr val="8A8882"/>
+            </a:solidFill>
+          </a:ln>
+        </p:spPr>
+        <p:style>
+          <a:lnRef idx="2">
+            <a:schemeClr val="accent1"/>
+          </a:lnRef>
+          <a:fillRef idx="0">
+            <a:schemeClr val="accent1"/>
+          </a:fillRef>
+          <a:effectRef idx="1">
+            <a:schemeClr val="accent1"/>
+          </a:effectRef>
+          <a:fontRef idx="minor">
+            <a:schemeClr val="tx1"/>
+          </a:fontRef>
+        </p:style>
+      </p:cxnSp>
+      <p:cxnSp>
+        <p:nvCxnSpPr>
+          <p:cNvPr id="83" name="Connector 82"/>
+          <p:cNvCxnSpPr/>
+          <p:nvPr/>
+        </p:nvCxnSpPr>
+        <p:spPr>
+          <a:xfrm>
+            <a:off x="3776472" y="1627632"/>
+            <a:ext cx="1600200" cy="0"/>
           </a:xfrm>
           <a:prstGeom prst="line">
             <a:avLst/>
@@ -11039,14 +11045,14 @@
       </p:cxnSp>
       <p:cxnSp>
         <p:nvCxnSpPr>
-          <p:cNvPr id="83" name="Connector 82"/>
+          <p:cNvPr id="84" name="Connector 83"/>
           <p:cNvCxnSpPr/>
           <p:nvPr/>
         </p:nvCxnSpPr>
         <p:spPr>
-          <a:xfrm flipV="1">
-            <a:off x="3776472" y="3017520"/>
-            <a:ext cx="0" cy="100584"/>
+          <a:xfrm>
+            <a:off x="3054096" y="1627632"/>
+            <a:ext cx="2322576" cy="0"/>
           </a:xfrm>
           <a:prstGeom prst="line">
             <a:avLst/>
@@ -11075,14 +11081,84 @@
       </p:cxnSp>
       <p:cxnSp>
         <p:nvCxnSpPr>
-          <p:cNvPr id="84" name="Connector 83"/>
+          <p:cNvPr id="85" name="Connector 84"/>
           <p:cNvCxnSpPr/>
           <p:nvPr/>
         </p:nvCxnSpPr>
         <p:spPr>
-          <a:xfrm>
-            <a:off x="4370832" y="2779776"/>
-            <a:ext cx="128016" cy="0"/>
+          <a:xfrm flipV="1">
+            <a:off x="2487168" y="1298448"/>
+            <a:ext cx="0" cy="667512"/>
+          </a:xfrm>
+          <a:prstGeom prst="line">
+            <a:avLst/>
+          </a:prstGeom>
+          <a:ln w="13970">
+            <a:solidFill>
+              <a:srgbClr val="8A8882"/>
+            </a:solidFill>
+          </a:ln>
+        </p:spPr>
+        <p:style>
+          <a:lnRef idx="2">
+            <a:schemeClr val="accent1"/>
+          </a:lnRef>
+          <a:fillRef idx="0">
+            <a:schemeClr val="accent1"/>
+          </a:fillRef>
+          <a:effectRef idx="1">
+            <a:schemeClr val="accent1"/>
+          </a:effectRef>
+          <a:fontRef idx="minor">
+            <a:schemeClr val="tx1"/>
+          </a:fontRef>
+        </p:style>
+      </p:cxnSp>
+      <p:cxnSp>
+        <p:nvCxnSpPr>
+          <p:cNvPr id="86" name="Connector 85"/>
+          <p:cNvCxnSpPr/>
+          <p:nvPr/>
+        </p:nvCxnSpPr>
+        <p:spPr>
+          <a:xfrm>
+            <a:off x="2487168" y="1298448"/>
+            <a:ext cx="3538728" cy="0"/>
+          </a:xfrm>
+          <a:prstGeom prst="line">
+            <a:avLst/>
+          </a:prstGeom>
+          <a:ln w="13970">
+            <a:solidFill>
+              <a:srgbClr val="8A8882"/>
+            </a:solidFill>
+          </a:ln>
+        </p:spPr>
+        <p:style>
+          <a:lnRef idx="2">
+            <a:schemeClr val="accent1"/>
+          </a:lnRef>
+          <a:fillRef idx="0">
+            <a:schemeClr val="accent1"/>
+          </a:fillRef>
+          <a:effectRef idx="1">
+            <a:schemeClr val="accent1"/>
+          </a:effectRef>
+          <a:fontRef idx="minor">
+            <a:schemeClr val="tx1"/>
+          </a:fontRef>
+        </p:style>
+      </p:cxnSp>
+      <p:cxnSp>
+        <p:nvCxnSpPr>
+          <p:cNvPr id="87" name="Connector 86"/>
+          <p:cNvCxnSpPr/>
+          <p:nvPr/>
+        </p:nvCxnSpPr>
+        <p:spPr>
+          <a:xfrm>
+            <a:off x="6025896" y="1298448"/>
+            <a:ext cx="0" cy="91440"/>
           </a:xfrm>
           <a:prstGeom prst="line">
             <a:avLst/>
@@ -11111,49 +11187,14 @@
       </p:cxnSp>
       <p:cxnSp>
         <p:nvCxnSpPr>
-          <p:cNvPr id="85" name="Connector 84"/>
+          <p:cNvPr id="88" name="Connector 87"/>
           <p:cNvCxnSpPr/>
           <p:nvPr/>
         </p:nvCxnSpPr>
         <p:spPr>
-          <a:xfrm flipV="1">
-            <a:off x="4764024" y="1627632"/>
-            <a:ext cx="0" cy="914400"/>
-          </a:xfrm>
-          <a:prstGeom prst="line">
-            <a:avLst/>
-          </a:prstGeom>
-          <a:ln w="13970">
-            <a:solidFill>
-              <a:srgbClr val="8A8882"/>
-            </a:solidFill>
-          </a:ln>
-        </p:spPr>
-        <p:style>
-          <a:lnRef idx="2">
-            <a:schemeClr val="accent1"/>
-          </a:lnRef>
-          <a:fillRef idx="0">
-            <a:schemeClr val="accent1"/>
-          </a:fillRef>
-          <a:effectRef idx="1">
-            <a:schemeClr val="accent1"/>
-          </a:effectRef>
-          <a:fontRef idx="minor">
-            <a:schemeClr val="tx1"/>
-          </a:fontRef>
-        </p:style>
-      </p:cxnSp>
-      <p:cxnSp>
-        <p:nvCxnSpPr>
-          <p:cNvPr id="86" name="Connector 85"/>
-          <p:cNvCxnSpPr/>
-          <p:nvPr/>
-        </p:nvCxnSpPr>
-        <p:spPr>
-          <a:xfrm>
-            <a:off x="4764024" y="1627632"/>
-            <a:ext cx="612648" cy="0"/>
+          <a:xfrm>
+            <a:off x="3054096" y="5084064"/>
+            <a:ext cx="128016" cy="0"/>
           </a:xfrm>
           <a:prstGeom prst="line">
             <a:avLst/>
@@ -11182,14 +11223,49 @@
       </p:cxnSp>
       <p:cxnSp>
         <p:nvCxnSpPr>
-          <p:cNvPr id="87" name="Connector 86"/>
+          <p:cNvPr id="89" name="Connector 88"/>
           <p:cNvCxnSpPr/>
           <p:nvPr/>
         </p:nvCxnSpPr>
         <p:spPr>
           <a:xfrm>
-            <a:off x="3054096" y="1627632"/>
-            <a:ext cx="2322576" cy="0"/>
+            <a:off x="4370832" y="5084064"/>
+            <a:ext cx="393192" cy="0"/>
+          </a:xfrm>
+          <a:prstGeom prst="line">
+            <a:avLst/>
+          </a:prstGeom>
+          <a:ln w="13970">
+            <a:solidFill>
+              <a:srgbClr val="8A8882"/>
+            </a:solidFill>
+          </a:ln>
+        </p:spPr>
+        <p:style>
+          <a:lnRef idx="2">
+            <a:schemeClr val="accent1"/>
+          </a:lnRef>
+          <a:fillRef idx="0">
+            <a:schemeClr val="accent1"/>
+          </a:fillRef>
+          <a:effectRef idx="1">
+            <a:schemeClr val="accent1"/>
+          </a:effectRef>
+          <a:fontRef idx="minor">
+            <a:schemeClr val="tx1"/>
+          </a:fontRef>
+        </p:style>
+      </p:cxnSp>
+      <p:cxnSp>
+        <p:nvCxnSpPr>
+          <p:cNvPr id="90" name="Connector 89"/>
+          <p:cNvCxnSpPr/>
+          <p:nvPr/>
+        </p:nvCxnSpPr>
+        <p:spPr>
+          <a:xfrm flipV="1">
+            <a:off x="4764024" y="4745736"/>
+            <a:ext cx="0" cy="338328"/>
           </a:xfrm>
           <a:prstGeom prst="line">
             <a:avLst/>
@@ -11218,14 +11294,14 @@
       </p:cxnSp>
       <p:cxnSp>
         <p:nvCxnSpPr>
-          <p:cNvPr id="88" name="Connector 87"/>
+          <p:cNvPr id="91" name="Connector 90"/>
           <p:cNvCxnSpPr/>
           <p:nvPr/>
         </p:nvCxnSpPr>
         <p:spPr>
           <a:xfrm flipV="1">
-            <a:off x="2487168" y="1298448"/>
-            <a:ext cx="0" cy="667512"/>
+            <a:off x="5102352" y="1627632"/>
+            <a:ext cx="0" cy="2642616"/>
           </a:xfrm>
           <a:prstGeom prst="line">
             <a:avLst/>
@@ -11253,49 +11329,14 @@
       </p:cxnSp>
       <p:cxnSp>
         <p:nvCxnSpPr>
-          <p:cNvPr id="89" name="Connector 88"/>
+          <p:cNvPr id="92" name="Connector 91"/>
           <p:cNvCxnSpPr/>
           <p:nvPr/>
         </p:nvCxnSpPr>
         <p:spPr>
           <a:xfrm>
-            <a:off x="2487168" y="1298448"/>
-            <a:ext cx="3538728" cy="0"/>
-          </a:xfrm>
-          <a:prstGeom prst="line">
-            <a:avLst/>
-          </a:prstGeom>
-          <a:ln w="13970">
-            <a:solidFill>
-              <a:srgbClr val="8A8882"/>
-            </a:solidFill>
-          </a:ln>
-        </p:spPr>
-        <p:style>
-          <a:lnRef idx="2">
-            <a:schemeClr val="accent1"/>
-          </a:lnRef>
-          <a:fillRef idx="0">
-            <a:schemeClr val="accent1"/>
-          </a:fillRef>
-          <a:effectRef idx="1">
-            <a:schemeClr val="accent1"/>
-          </a:effectRef>
-          <a:fontRef idx="minor">
-            <a:schemeClr val="tx1"/>
-          </a:fontRef>
-        </p:style>
-      </p:cxnSp>
-      <p:cxnSp>
-        <p:nvCxnSpPr>
-          <p:cNvPr id="90" name="Connector 89"/>
-          <p:cNvCxnSpPr/>
-          <p:nvPr/>
-        </p:nvCxnSpPr>
-        <p:spPr>
-          <a:xfrm>
-            <a:off x="6025896" y="1298448"/>
-            <a:ext cx="0" cy="91440"/>
+            <a:off x="5102352" y="1627632"/>
+            <a:ext cx="274320" cy="0"/>
           </a:xfrm>
           <a:prstGeom prst="line">
             <a:avLst/>
@@ -11324,14 +11365,14 @@
       </p:cxnSp>
       <p:cxnSp>
         <p:nvCxnSpPr>
-          <p:cNvPr id="91" name="Connector 90"/>
+          <p:cNvPr id="93" name="Connector 92"/>
           <p:cNvCxnSpPr/>
           <p:nvPr/>
         </p:nvCxnSpPr>
         <p:spPr>
           <a:xfrm>
-            <a:off x="3054096" y="5084064"/>
-            <a:ext cx="128016" cy="0"/>
+            <a:off x="3054096" y="5660136"/>
+            <a:ext cx="1444752" cy="0"/>
           </a:xfrm>
           <a:prstGeom prst="line">
             <a:avLst/>
@@ -11360,14 +11401,14 @@
       </p:cxnSp>
       <p:cxnSp>
         <p:nvCxnSpPr>
-          <p:cNvPr id="92" name="Connector 91"/>
+          <p:cNvPr id="94" name="Connector 93"/>
           <p:cNvCxnSpPr/>
           <p:nvPr/>
         </p:nvCxnSpPr>
         <p:spPr>
-          <a:xfrm>
-            <a:off x="4370832" y="5084064"/>
-            <a:ext cx="393192" cy="0"/>
+          <a:xfrm flipV="1">
+            <a:off x="5193792" y="2203704"/>
+            <a:ext cx="0" cy="3218688"/>
           </a:xfrm>
           <a:prstGeom prst="line">
             <a:avLst/>
@@ -11395,14 +11436,14 @@
       </p:cxnSp>
       <p:cxnSp>
         <p:nvCxnSpPr>
-          <p:cNvPr id="93" name="Connector 92"/>
+          <p:cNvPr id="95" name="Connector 94"/>
           <p:cNvCxnSpPr/>
           <p:nvPr/>
         </p:nvCxnSpPr>
         <p:spPr>
-          <a:xfrm flipV="1">
-            <a:off x="4764024" y="4745736"/>
-            <a:ext cx="0" cy="338328"/>
+          <a:xfrm>
+            <a:off x="5193792" y="2203704"/>
+            <a:ext cx="182880" cy="0"/>
           </a:xfrm>
           <a:prstGeom prst="line">
             <a:avLst/>
@@ -11431,49 +11472,14 @@
       </p:cxnSp>
       <p:cxnSp>
         <p:nvCxnSpPr>
-          <p:cNvPr id="94" name="Connector 93"/>
+          <p:cNvPr id="96" name="Connector 95"/>
           <p:cNvCxnSpPr/>
           <p:nvPr/>
         </p:nvCxnSpPr>
         <p:spPr>
-          <a:xfrm flipV="1">
-            <a:off x="5102352" y="1627632"/>
-            <a:ext cx="0" cy="2642616"/>
-          </a:xfrm>
-          <a:prstGeom prst="line">
-            <a:avLst/>
-          </a:prstGeom>
-          <a:ln w="13970">
-            <a:solidFill>
-              <a:srgbClr val="8A8882"/>
-            </a:solidFill>
-          </a:ln>
-        </p:spPr>
-        <p:style>
-          <a:lnRef idx="2">
-            <a:schemeClr val="accent1"/>
-          </a:lnRef>
-          <a:fillRef idx="0">
-            <a:schemeClr val="accent1"/>
-          </a:fillRef>
-          <a:effectRef idx="1">
-            <a:schemeClr val="accent1"/>
-          </a:effectRef>
-          <a:fontRef idx="minor">
-            <a:schemeClr val="tx1"/>
-          </a:fontRef>
-        </p:style>
-      </p:cxnSp>
-      <p:cxnSp>
-        <p:nvCxnSpPr>
-          <p:cNvPr id="95" name="Connector 94"/>
-          <p:cNvCxnSpPr/>
-          <p:nvPr/>
-        </p:nvCxnSpPr>
-        <p:spPr>
-          <a:xfrm>
-            <a:off x="5102352" y="1627632"/>
-            <a:ext cx="274320" cy="0"/>
+          <a:xfrm>
+            <a:off x="6025896" y="2441448"/>
+            <a:ext cx="0" cy="100584"/>
           </a:xfrm>
           <a:prstGeom prst="line">
             <a:avLst/>
@@ -11502,14 +11508,49 @@
       </p:cxnSp>
       <p:cxnSp>
         <p:nvCxnSpPr>
-          <p:cNvPr id="96" name="Connector 95"/>
+          <p:cNvPr id="97" name="Connector 96"/>
           <p:cNvCxnSpPr/>
           <p:nvPr/>
         </p:nvCxnSpPr>
         <p:spPr>
           <a:xfrm>
-            <a:off x="3054096" y="5660136"/>
-            <a:ext cx="1444752" cy="0"/>
+            <a:off x="6784848" y="1865376"/>
+            <a:ext cx="0" cy="1490472"/>
+          </a:xfrm>
+          <a:prstGeom prst="line">
+            <a:avLst/>
+          </a:prstGeom>
+          <a:ln w="13970">
+            <a:solidFill>
+              <a:srgbClr val="8A8882"/>
+            </a:solidFill>
+          </a:ln>
+        </p:spPr>
+        <p:style>
+          <a:lnRef idx="2">
+            <a:schemeClr val="accent1"/>
+          </a:lnRef>
+          <a:fillRef idx="0">
+            <a:schemeClr val="accent1"/>
+          </a:fillRef>
+          <a:effectRef idx="1">
+            <a:schemeClr val="accent1"/>
+          </a:effectRef>
+          <a:fontRef idx="minor">
+            <a:schemeClr val="tx1"/>
+          </a:fontRef>
+        </p:style>
+      </p:cxnSp>
+      <p:cxnSp>
+        <p:nvCxnSpPr>
+          <p:cNvPr id="98" name="Connector 97"/>
+          <p:cNvCxnSpPr/>
+          <p:nvPr/>
+        </p:nvCxnSpPr>
+        <p:spPr>
+          <a:xfrm>
+            <a:off x="6784848" y="3355848"/>
+            <a:ext cx="54864" cy="0"/>
           </a:xfrm>
           <a:prstGeom prst="line">
             <a:avLst/>
@@ -11538,14 +11579,14 @@
       </p:cxnSp>
       <p:cxnSp>
         <p:nvCxnSpPr>
-          <p:cNvPr id="97" name="Connector 96"/>
+          <p:cNvPr id="99" name="Connector 98"/>
           <p:cNvCxnSpPr/>
           <p:nvPr/>
         </p:nvCxnSpPr>
         <p:spPr>
-          <a:xfrm flipV="1">
-            <a:off x="5193792" y="2203704"/>
-            <a:ext cx="0" cy="3218688"/>
+          <a:xfrm>
+            <a:off x="6025896" y="3017520"/>
+            <a:ext cx="0" cy="338328"/>
           </a:xfrm>
           <a:prstGeom prst="line">
             <a:avLst/>
@@ -11573,14 +11614,14 @@
       </p:cxnSp>
       <p:cxnSp>
         <p:nvCxnSpPr>
-          <p:cNvPr id="98" name="Connector 97"/>
+          <p:cNvPr id="100" name="Connector 99"/>
           <p:cNvCxnSpPr/>
           <p:nvPr/>
         </p:nvCxnSpPr>
         <p:spPr>
           <a:xfrm>
-            <a:off x="5193792" y="2203704"/>
-            <a:ext cx="182880" cy="0"/>
+            <a:off x="6025896" y="3355848"/>
+            <a:ext cx="813816" cy="0"/>
           </a:xfrm>
           <a:prstGeom prst="line">
             <a:avLst/>
@@ -11609,13 +11650,13 @@
       </p:cxnSp>
       <p:cxnSp>
         <p:nvCxnSpPr>
-          <p:cNvPr id="99" name="Connector 98"/>
+          <p:cNvPr id="101" name="Connector 100"/>
           <p:cNvCxnSpPr/>
           <p:nvPr/>
         </p:nvCxnSpPr>
         <p:spPr>
-          <a:xfrm>
-            <a:off x="6025896" y="2441448"/>
+          <a:xfrm flipV="1">
+            <a:off x="7488936" y="3017520"/>
             <a:ext cx="0" cy="100584"/>
           </a:xfrm>
           <a:prstGeom prst="line">
@@ -11645,49 +11686,14 @@
       </p:cxnSp>
       <p:cxnSp>
         <p:nvCxnSpPr>
-          <p:cNvPr id="100" name="Connector 99"/>
+          <p:cNvPr id="102" name="Connector 101"/>
           <p:cNvCxnSpPr/>
           <p:nvPr/>
         </p:nvCxnSpPr>
         <p:spPr>
-          <a:xfrm>
-            <a:off x="6784848" y="1865376"/>
-            <a:ext cx="0" cy="1490472"/>
-          </a:xfrm>
-          <a:prstGeom prst="line">
-            <a:avLst/>
-          </a:prstGeom>
-          <a:ln w="13970">
-            <a:solidFill>
-              <a:srgbClr val="8A8882"/>
-            </a:solidFill>
-          </a:ln>
-        </p:spPr>
-        <p:style>
-          <a:lnRef idx="2">
-            <a:schemeClr val="accent1"/>
-          </a:lnRef>
-          <a:fillRef idx="0">
-            <a:schemeClr val="accent1"/>
-          </a:fillRef>
-          <a:effectRef idx="1">
-            <a:schemeClr val="accent1"/>
-          </a:effectRef>
-          <a:fontRef idx="minor">
-            <a:schemeClr val="tx1"/>
-          </a:fontRef>
-        </p:style>
-      </p:cxnSp>
-      <p:cxnSp>
-        <p:nvCxnSpPr>
-          <p:cNvPr id="101" name="Connector 100"/>
-          <p:cNvCxnSpPr/>
-          <p:nvPr/>
-        </p:nvCxnSpPr>
-        <p:spPr>
-          <a:xfrm>
-            <a:off x="6784848" y="3355848"/>
-            <a:ext cx="54864" cy="0"/>
+          <a:xfrm flipV="1">
+            <a:off x="7488936" y="2441448"/>
+            <a:ext cx="0" cy="100584"/>
           </a:xfrm>
           <a:prstGeom prst="line">
             <a:avLst/>
@@ -11716,49 +11722,14 @@
       </p:cxnSp>
       <p:cxnSp>
         <p:nvCxnSpPr>
-          <p:cNvPr id="102" name="Connector 101"/>
-          <p:cNvCxnSpPr/>
-          <p:nvPr/>
-        </p:nvCxnSpPr>
-        <p:spPr>
-          <a:xfrm>
-            <a:off x="6025896" y="3017520"/>
-            <a:ext cx="0" cy="338328"/>
-          </a:xfrm>
-          <a:prstGeom prst="line">
-            <a:avLst/>
-          </a:prstGeom>
-          <a:ln w="13970">
-            <a:solidFill>
-              <a:srgbClr val="8A8882"/>
-            </a:solidFill>
-          </a:ln>
-        </p:spPr>
-        <p:style>
-          <a:lnRef idx="2">
-            <a:schemeClr val="accent1"/>
-          </a:lnRef>
-          <a:fillRef idx="0">
-            <a:schemeClr val="accent1"/>
-          </a:fillRef>
-          <a:effectRef idx="1">
-            <a:schemeClr val="accent1"/>
-          </a:effectRef>
-          <a:fontRef idx="minor">
-            <a:schemeClr val="tx1"/>
-          </a:fontRef>
-        </p:style>
-      </p:cxnSp>
-      <p:cxnSp>
-        <p:nvCxnSpPr>
           <p:cNvPr id="103" name="Connector 102"/>
           <p:cNvCxnSpPr/>
           <p:nvPr/>
         </p:nvCxnSpPr>
         <p:spPr>
-          <a:xfrm>
-            <a:off x="6025896" y="3355848"/>
-            <a:ext cx="813816" cy="0"/>
+          <a:xfrm flipV="1">
+            <a:off x="7488936" y="1865376"/>
+            <a:ext cx="0" cy="100584"/>
           </a:xfrm>
           <a:prstGeom prst="line">
             <a:avLst/>
@@ -11792,9 +11763,9 @@
           <p:nvPr/>
         </p:nvCxnSpPr>
         <p:spPr>
-          <a:xfrm flipV="1">
-            <a:off x="7488936" y="3017520"/>
-            <a:ext cx="0" cy="100584"/>
+          <a:xfrm>
+            <a:off x="8138160" y="1627632"/>
+            <a:ext cx="128015" cy="0"/>
           </a:xfrm>
           <a:prstGeom prst="line">
             <a:avLst/>
@@ -11828,9 +11799,9 @@
           <p:nvPr/>
         </p:nvCxnSpPr>
         <p:spPr>
-          <a:xfrm flipV="1">
-            <a:off x="7488936" y="2441448"/>
-            <a:ext cx="0" cy="100584"/>
+          <a:xfrm>
+            <a:off x="9400032" y="1627632"/>
+            <a:ext cx="201168" cy="0"/>
           </a:xfrm>
           <a:prstGeom prst="line">
             <a:avLst/>
@@ -11864,8 +11835,8 @@
           <p:nvPr/>
         </p:nvCxnSpPr>
         <p:spPr>
-          <a:xfrm flipV="1">
-            <a:off x="7488936" y="1865376"/>
+          <a:xfrm>
+            <a:off x="10309860" y="1865376"/>
             <a:ext cx="0" cy="100584"/>
           </a:xfrm>
           <a:prstGeom prst="line">
@@ -11901,8 +11872,8 @@
         </p:nvCxnSpPr>
         <p:spPr>
           <a:xfrm>
-            <a:off x="8138160" y="1627632"/>
-            <a:ext cx="128015" cy="0"/>
+            <a:off x="10309860" y="2441448"/>
+            <a:ext cx="0" cy="100584"/>
           </a:xfrm>
           <a:prstGeom prst="line">
             <a:avLst/>
@@ -11937,8 +11908,8 @@
         </p:nvCxnSpPr>
         <p:spPr>
           <a:xfrm>
-            <a:off x="9400032" y="1627632"/>
-            <a:ext cx="201168" cy="0"/>
+            <a:off x="10309860" y="3017520"/>
+            <a:ext cx="0" cy="100584"/>
           </a:xfrm>
           <a:prstGeom prst="line">
             <a:avLst/>
@@ -11973,7 +11944,7 @@
         </p:nvCxnSpPr>
         <p:spPr>
           <a:xfrm>
-            <a:off x="10309860" y="1865376"/>
+            <a:off x="10309860" y="3593592"/>
             <a:ext cx="0" cy="100584"/>
           </a:xfrm>
           <a:prstGeom prst="line">
@@ -12009,7 +11980,7 @@
         </p:nvCxnSpPr>
         <p:spPr>
           <a:xfrm>
-            <a:off x="10309860" y="2441448"/>
+            <a:off x="10309860" y="4169664"/>
             <a:ext cx="0" cy="100584"/>
           </a:xfrm>
           <a:prstGeom prst="line">
@@ -12037,117 +12008,9 @@
           </a:fontRef>
         </p:style>
       </p:cxnSp>
-      <p:cxnSp>
-        <p:nvCxnSpPr>
-          <p:cNvPr id="111" name="Connector 110"/>
-          <p:cNvCxnSpPr/>
-          <p:nvPr/>
-        </p:nvCxnSpPr>
-        <p:spPr>
-          <a:xfrm>
-            <a:off x="10309860" y="3017520"/>
-            <a:ext cx="0" cy="100584"/>
-          </a:xfrm>
-          <a:prstGeom prst="line">
-            <a:avLst/>
-          </a:prstGeom>
-          <a:ln w="13970">
-            <a:solidFill>
-              <a:srgbClr val="8A8882"/>
-            </a:solidFill>
-            <a:tailEnd type="triangle" w="sm" len="sm"/>
-          </a:ln>
-        </p:spPr>
-        <p:style>
-          <a:lnRef idx="2">
-            <a:schemeClr val="accent1"/>
-          </a:lnRef>
-          <a:fillRef idx="0">
-            <a:schemeClr val="accent1"/>
-          </a:fillRef>
-          <a:effectRef idx="1">
-            <a:schemeClr val="accent1"/>
-          </a:effectRef>
-          <a:fontRef idx="minor">
-            <a:schemeClr val="tx1"/>
-          </a:fontRef>
-        </p:style>
-      </p:cxnSp>
-      <p:cxnSp>
-        <p:nvCxnSpPr>
-          <p:cNvPr id="112" name="Connector 111"/>
-          <p:cNvCxnSpPr/>
-          <p:nvPr/>
-        </p:nvCxnSpPr>
-        <p:spPr>
-          <a:xfrm>
-            <a:off x="10309860" y="3593592"/>
-            <a:ext cx="0" cy="100584"/>
-          </a:xfrm>
-          <a:prstGeom prst="line">
-            <a:avLst/>
-          </a:prstGeom>
-          <a:ln w="13970">
-            <a:solidFill>
-              <a:srgbClr val="8A8882"/>
-            </a:solidFill>
-            <a:tailEnd type="triangle" w="sm" len="sm"/>
-          </a:ln>
-        </p:spPr>
-        <p:style>
-          <a:lnRef idx="2">
-            <a:schemeClr val="accent1"/>
-          </a:lnRef>
-          <a:fillRef idx="0">
-            <a:schemeClr val="accent1"/>
-          </a:fillRef>
-          <a:effectRef idx="1">
-            <a:schemeClr val="accent1"/>
-          </a:effectRef>
-          <a:fontRef idx="minor">
-            <a:schemeClr val="tx1"/>
-          </a:fontRef>
-        </p:style>
-      </p:cxnSp>
-      <p:cxnSp>
-        <p:nvCxnSpPr>
-          <p:cNvPr id="113" name="Connector 112"/>
-          <p:cNvCxnSpPr/>
-          <p:nvPr/>
-        </p:nvCxnSpPr>
-        <p:spPr>
-          <a:xfrm>
-            <a:off x="10309860" y="4169664"/>
-            <a:ext cx="0" cy="100584"/>
-          </a:xfrm>
-          <a:prstGeom prst="line">
-            <a:avLst/>
-          </a:prstGeom>
-          <a:ln w="13970">
-            <a:solidFill>
-              <a:srgbClr val="8A8882"/>
-            </a:solidFill>
-            <a:tailEnd type="triangle" w="sm" len="sm"/>
-          </a:ln>
-        </p:spPr>
-        <p:style>
-          <a:lnRef idx="2">
-            <a:schemeClr val="accent1"/>
-          </a:lnRef>
-          <a:fillRef idx="0">
-            <a:schemeClr val="accent1"/>
-          </a:fillRef>
-          <a:effectRef idx="1">
-            <a:schemeClr val="accent1"/>
-          </a:effectRef>
-          <a:fontRef idx="minor">
-            <a:schemeClr val="tx1"/>
-          </a:fontRef>
-        </p:style>
-      </p:cxnSp>
-      <p:sp>
-        <p:nvSpPr>
-          <p:cNvPr id="114" name="TextBox 113"/>
+      <p:sp>
+        <p:nvSpPr>
+          <p:cNvPr id="111" name="TextBox 110"/>
           <p:cNvSpPr txBox="1"/>
           <p:nvPr/>
         </p:nvSpPr>
